--- a/His Mercy is More.pptx
+++ b/His Mercy is More.pptx
@@ -6,16 +6,20 @@
   </p:sldMasterIdLst>
   <p:sldIdLst>
     <p:sldId id="274" r:id="rId2"/>
-    <p:sldId id="280" r:id="rId3"/>
-    <p:sldId id="281" r:id="rId4"/>
-    <p:sldId id="282" r:id="rId5"/>
-    <p:sldId id="283" r:id="rId6"/>
-    <p:sldId id="284" r:id="rId7"/>
-    <p:sldId id="285" r:id="rId8"/>
-    <p:sldId id="286" r:id="rId9"/>
-    <p:sldId id="287" r:id="rId10"/>
-    <p:sldId id="288" r:id="rId11"/>
-    <p:sldId id="289" r:id="rId12"/>
+    <p:sldId id="319" r:id="rId3"/>
+    <p:sldId id="350" r:id="rId4"/>
+    <p:sldId id="320" r:id="rId5"/>
+    <p:sldId id="321" r:id="rId6"/>
+    <p:sldId id="322" r:id="rId7"/>
+    <p:sldId id="351" r:id="rId8"/>
+    <p:sldId id="323" r:id="rId9"/>
+    <p:sldId id="324" r:id="rId10"/>
+    <p:sldId id="325" r:id="rId11"/>
+    <p:sldId id="352" r:id="rId12"/>
+    <p:sldId id="326" r:id="rId13"/>
+    <p:sldId id="327" r:id="rId14"/>
+    <p:sldId id="328" r:id="rId15"/>
+    <p:sldId id="353" r:id="rId16"/>
   </p:sldIdLst>
   <p:sldSz cx="9144000" cy="6858000" type="screen4x3"/>
   <p:notesSz cx="6858000" cy="9144000"/>
@@ -253,7 +257,7 @@
           <a:p>
             <a:fld id="{E759A0DE-F190-5444-87AC-4719D5F20D15}" type="datetimeFigureOut">
               <a:rPr lang="en-US" smtClean="0"/>
-              <a:t>8/8/26</a:t>
+              <a:t>10/8/26</a:t>
             </a:fld>
             <a:endParaRPr lang="en-US"/>
           </a:p>
@@ -423,7 +427,7 @@
           <a:p>
             <a:fld id="{E759A0DE-F190-5444-87AC-4719D5F20D15}" type="datetimeFigureOut">
               <a:rPr lang="en-US" smtClean="0"/>
-              <a:t>8/8/26</a:t>
+              <a:t>10/8/26</a:t>
             </a:fld>
             <a:endParaRPr lang="en-US"/>
           </a:p>
@@ -603,7 +607,7 @@
           <a:p>
             <a:fld id="{E759A0DE-F190-5444-87AC-4719D5F20D15}" type="datetimeFigureOut">
               <a:rPr lang="en-US" smtClean="0"/>
-              <a:t>8/8/26</a:t>
+              <a:t>10/8/26</a:t>
             </a:fld>
             <a:endParaRPr lang="en-US"/>
           </a:p>
@@ -773,7 +777,7 @@
           <a:p>
             <a:fld id="{E759A0DE-F190-5444-87AC-4719D5F20D15}" type="datetimeFigureOut">
               <a:rPr lang="en-US" smtClean="0"/>
-              <a:t>8/8/26</a:t>
+              <a:t>10/8/26</a:t>
             </a:fld>
             <a:endParaRPr lang="en-US"/>
           </a:p>
@@ -1019,7 +1023,7 @@
           <a:p>
             <a:fld id="{E759A0DE-F190-5444-87AC-4719D5F20D15}" type="datetimeFigureOut">
               <a:rPr lang="en-US" smtClean="0"/>
-              <a:t>8/8/26</a:t>
+              <a:t>10/8/26</a:t>
             </a:fld>
             <a:endParaRPr lang="en-US"/>
           </a:p>
@@ -1251,7 +1255,7 @@
           <a:p>
             <a:fld id="{E759A0DE-F190-5444-87AC-4719D5F20D15}" type="datetimeFigureOut">
               <a:rPr lang="en-US" smtClean="0"/>
-              <a:t>8/8/26</a:t>
+              <a:t>10/8/26</a:t>
             </a:fld>
             <a:endParaRPr lang="en-US"/>
           </a:p>
@@ -1618,7 +1622,7 @@
           <a:p>
             <a:fld id="{E759A0DE-F190-5444-87AC-4719D5F20D15}" type="datetimeFigureOut">
               <a:rPr lang="en-US" smtClean="0"/>
-              <a:t>8/8/26</a:t>
+              <a:t>10/8/26</a:t>
             </a:fld>
             <a:endParaRPr lang="en-US"/>
           </a:p>
@@ -1736,7 +1740,7 @@
           <a:p>
             <a:fld id="{E759A0DE-F190-5444-87AC-4719D5F20D15}" type="datetimeFigureOut">
               <a:rPr lang="en-US" smtClean="0"/>
-              <a:t>8/8/26</a:t>
+              <a:t>10/8/26</a:t>
             </a:fld>
             <a:endParaRPr lang="en-US"/>
           </a:p>
@@ -1831,7 +1835,7 @@
           <a:p>
             <a:fld id="{E759A0DE-F190-5444-87AC-4719D5F20D15}" type="datetimeFigureOut">
               <a:rPr lang="en-US" smtClean="0"/>
-              <a:t>8/8/26</a:t>
+              <a:t>10/8/26</a:t>
             </a:fld>
             <a:endParaRPr lang="en-US"/>
           </a:p>
@@ -2108,7 +2112,7 @@
           <a:p>
             <a:fld id="{E759A0DE-F190-5444-87AC-4719D5F20D15}" type="datetimeFigureOut">
               <a:rPr lang="en-US" smtClean="0"/>
-              <a:t>8/8/26</a:t>
+              <a:t>10/8/26</a:t>
             </a:fld>
             <a:endParaRPr lang="en-US"/>
           </a:p>
@@ -2365,7 +2369,7 @@
           <a:p>
             <a:fld id="{E759A0DE-F190-5444-87AC-4719D5F20D15}" type="datetimeFigureOut">
               <a:rPr lang="en-US" smtClean="0"/>
-              <a:t>8/8/26</a:t>
+              <a:t>10/8/26</a:t>
             </a:fld>
             <a:endParaRPr lang="en-US"/>
           </a:p>
@@ -2578,7 +2582,7 @@
           <a:p>
             <a:fld id="{E759A0DE-F190-5444-87AC-4719D5F20D15}" type="datetimeFigureOut">
               <a:rPr lang="en-US" smtClean="0"/>
-              <a:t>8/8/26</a:t>
+              <a:t>10/8/26</a:t>
             </a:fld>
             <a:endParaRPr lang="en-US"/>
           </a:p>
@@ -3130,6 +3134,483 @@
         <p:cNvPr id="1" name="">
           <a:extLst>
             <a:ext uri="{FF2B5EF4-FFF2-40B4-BE49-F238E27FC236}">
+              <a16:creationId xmlns:a16="http://schemas.microsoft.com/office/drawing/2014/main" id="{66E0F6E0-FEFA-9F57-1DF6-F215E44678D8}"/>
+            </a:ext>
+          </a:extLst>
+        </p:cNvPr>
+        <p:cNvGrpSpPr/>
+        <p:nvPr/>
+      </p:nvGrpSpPr>
+      <p:grpSpPr>
+        <a:xfrm>
+          <a:off x="0" y="0"/>
+          <a:ext cx="0" cy="0"/>
+          <a:chOff x="0" y="0"/>
+          <a:chExt cx="0" cy="0"/>
+        </a:xfrm>
+      </p:grpSpPr>
+      <p:sp>
+        <p:nvSpPr>
+          <p:cNvPr id="3" name="Subtitle 2">
+            <a:extLst>
+              <a:ext uri="{FF2B5EF4-FFF2-40B4-BE49-F238E27FC236}">
+                <a16:creationId xmlns:a16="http://schemas.microsoft.com/office/drawing/2014/main" id="{5BD44CC7-EBEF-5573-A5E0-482C171670F6}"/>
+              </a:ext>
+            </a:extLst>
+          </p:cNvPr>
+          <p:cNvSpPr>
+            <a:spLocks noGrp="1"/>
+          </p:cNvSpPr>
+          <p:nvPr>
+            <p:ph type="subTitle" idx="1"/>
+          </p:nvPr>
+        </p:nvSpPr>
+        <p:spPr>
+          <a:xfrm>
+            <a:off x="84221" y="213360"/>
+            <a:ext cx="8891337" cy="6416040"/>
+          </a:xfrm>
+        </p:spPr>
+        <p:txBody>
+          <a:bodyPr>
+            <a:noAutofit/>
+          </a:bodyPr>
+          <a:lstStyle/>
+          <a:p>
+            <a:endParaRPr lang="en-US" sz="5400" dirty="0">
+              <a:solidFill>
+                <a:schemeClr val="bg1"/>
+              </a:solidFill>
+              <a:latin typeface="Avenir Medium" panose="02000503020000020003" pitchFamily="2" charset="0"/>
+              <a:ea typeface="Bodoni Ornaments" pitchFamily="2" charset="0"/>
+            </a:endParaRPr>
+          </a:p>
+          <a:p>
+            <a:r>
+              <a:rPr lang="en-US" sz="5400" dirty="0">
+                <a:solidFill>
+                  <a:schemeClr val="bg1"/>
+                </a:solidFill>
+                <a:latin typeface="Avenir Medium" panose="02000503020000020003" pitchFamily="2" charset="0"/>
+                <a:ea typeface="Bodoni Ornaments" pitchFamily="2" charset="0"/>
+              </a:rPr>
+              <a:t>Praise the Lord,</a:t>
+            </a:r>
+          </a:p>
+          <a:p>
+            <a:r>
+              <a:rPr lang="en-US" sz="5400" dirty="0">
+                <a:solidFill>
+                  <a:schemeClr val="bg1"/>
+                </a:solidFill>
+                <a:latin typeface="Avenir Medium" panose="02000503020000020003" pitchFamily="2" charset="0"/>
+                <a:ea typeface="Bodoni Ornaments" pitchFamily="2" charset="0"/>
+              </a:rPr>
+              <a:t>His mercy is more</a:t>
+            </a:r>
+          </a:p>
+          <a:p>
+            <a:endParaRPr lang="en-US" sz="5400" dirty="0">
+              <a:solidFill>
+                <a:schemeClr val="bg1"/>
+              </a:solidFill>
+              <a:latin typeface="Avenir Medium" panose="02000503020000020003" pitchFamily="2" charset="0"/>
+              <a:ea typeface="Bodoni Ornaments" pitchFamily="2" charset="0"/>
+            </a:endParaRPr>
+          </a:p>
+          <a:p>
+            <a:r>
+              <a:rPr lang="en-US" sz="5400" dirty="0">
+                <a:solidFill>
+                  <a:schemeClr val="bg1"/>
+                </a:solidFill>
+                <a:latin typeface="Avenir Medium" panose="02000503020000020003" pitchFamily="2" charset="0"/>
+                <a:ea typeface="Bodoni Ornaments" pitchFamily="2" charset="0"/>
+              </a:rPr>
+              <a:t>Stronger than darkness, </a:t>
+            </a:r>
+          </a:p>
+          <a:p>
+            <a:r>
+              <a:rPr lang="en-US" sz="5400" dirty="0">
+                <a:solidFill>
+                  <a:schemeClr val="bg1"/>
+                </a:solidFill>
+                <a:latin typeface="Avenir Medium" panose="02000503020000020003" pitchFamily="2" charset="0"/>
+                <a:ea typeface="Bodoni Ornaments" pitchFamily="2" charset="0"/>
+              </a:rPr>
+              <a:t>new every morn</a:t>
+            </a:r>
+          </a:p>
+          <a:p>
+            <a:endParaRPr lang="en-US" sz="5400" dirty="0">
+              <a:solidFill>
+                <a:schemeClr val="bg1"/>
+              </a:solidFill>
+              <a:latin typeface="Avenir Medium" panose="02000503020000020003" pitchFamily="2" charset="0"/>
+              <a:ea typeface="Bodoni Ornaments" pitchFamily="2" charset="0"/>
+            </a:endParaRPr>
+          </a:p>
+          <a:p>
+            <a:endParaRPr lang="en-US" sz="5400" dirty="0">
+              <a:solidFill>
+                <a:schemeClr val="bg1"/>
+              </a:solidFill>
+              <a:latin typeface="Avenir Medium" panose="02000503020000020003" pitchFamily="2" charset="0"/>
+              <a:ea typeface="Bodoni Ornaments" pitchFamily="2" charset="0"/>
+            </a:endParaRPr>
+          </a:p>
+          <a:p>
+            <a:endParaRPr lang="en-US" sz="5400" dirty="0">
+              <a:solidFill>
+                <a:schemeClr val="bg1"/>
+              </a:solidFill>
+              <a:latin typeface="Avenir Medium" panose="02000503020000020003" pitchFamily="2" charset="0"/>
+              <a:ea typeface="Bodoni Ornaments" pitchFamily="2" charset="0"/>
+            </a:endParaRPr>
+          </a:p>
+          <a:p>
+            <a:endParaRPr lang="en-US" sz="5400" dirty="0">
+              <a:solidFill>
+                <a:schemeClr val="bg1"/>
+              </a:solidFill>
+              <a:latin typeface="Avenir Medium" panose="02000503020000020003" pitchFamily="2" charset="0"/>
+              <a:ea typeface="Bodoni Ornaments" pitchFamily="2" charset="0"/>
+            </a:endParaRPr>
+          </a:p>
+        </p:txBody>
+      </p:sp>
+    </p:spTree>
+    <p:extLst>
+      <p:ext uri="{BB962C8B-B14F-4D97-AF65-F5344CB8AC3E}">
+        <p14:creationId xmlns:p14="http://schemas.microsoft.com/office/powerpoint/2010/main" val="1612110456"/>
+      </p:ext>
+    </p:extLst>
+  </p:cSld>
+  <p:clrMapOvr>
+    <a:masterClrMapping/>
+  </p:clrMapOvr>
+</p:sld>
+</file>
+
+<file path=ppt/slides/slide11.xml><?xml version="1.0" encoding="utf-8"?>
+<p:sld xmlns:a="http://schemas.openxmlformats.org/drawingml/2006/main" xmlns:r="http://schemas.openxmlformats.org/officeDocument/2006/relationships" xmlns:p="http://schemas.openxmlformats.org/presentationml/2006/main">
+  <p:cSld>
+    <p:bg>
+      <p:bgPr>
+        <a:solidFill>
+          <a:schemeClr val="tx1"/>
+        </a:solidFill>
+        <a:effectLst/>
+      </p:bgPr>
+    </p:bg>
+    <p:spTree>
+      <p:nvGrpSpPr>
+        <p:cNvPr id="1" name="">
+          <a:extLst>
+            <a:ext uri="{FF2B5EF4-FFF2-40B4-BE49-F238E27FC236}">
+              <a16:creationId xmlns:a16="http://schemas.microsoft.com/office/drawing/2014/main" id="{7BEC9F47-3F39-DB8B-7E49-8802582B14F6}"/>
+            </a:ext>
+          </a:extLst>
+        </p:cNvPr>
+        <p:cNvGrpSpPr/>
+        <p:nvPr/>
+      </p:nvGrpSpPr>
+      <p:grpSpPr>
+        <a:xfrm>
+          <a:off x="0" y="0"/>
+          <a:ext cx="0" cy="0"/>
+          <a:chOff x="0" y="0"/>
+          <a:chExt cx="0" cy="0"/>
+        </a:xfrm>
+      </p:grpSpPr>
+      <p:sp>
+        <p:nvSpPr>
+          <p:cNvPr id="3" name="Subtitle 2">
+            <a:extLst>
+              <a:ext uri="{FF2B5EF4-FFF2-40B4-BE49-F238E27FC236}">
+                <a16:creationId xmlns:a16="http://schemas.microsoft.com/office/drawing/2014/main" id="{5785E567-EE04-1F20-1450-FAA9CD3CEFC7}"/>
+              </a:ext>
+            </a:extLst>
+          </p:cNvPr>
+          <p:cNvSpPr>
+            <a:spLocks noGrp="1"/>
+          </p:cNvSpPr>
+          <p:nvPr>
+            <p:ph type="subTitle" idx="1"/>
+          </p:nvPr>
+        </p:nvSpPr>
+        <p:spPr>
+          <a:xfrm>
+            <a:off x="84221" y="213360"/>
+            <a:ext cx="8891337" cy="6416040"/>
+          </a:xfrm>
+        </p:spPr>
+        <p:txBody>
+          <a:bodyPr>
+            <a:noAutofit/>
+          </a:bodyPr>
+          <a:lstStyle/>
+          <a:p>
+            <a:endParaRPr lang="en-US" sz="5400" dirty="0">
+              <a:solidFill>
+                <a:schemeClr val="bg1"/>
+              </a:solidFill>
+              <a:latin typeface="Avenir Medium" panose="02000503020000020003" pitchFamily="2" charset="0"/>
+              <a:ea typeface="Bodoni Ornaments" pitchFamily="2" charset="0"/>
+            </a:endParaRPr>
+          </a:p>
+          <a:p>
+            <a:r>
+              <a:rPr lang="en-US" sz="5400" dirty="0">
+                <a:solidFill>
+                  <a:schemeClr val="bg1"/>
+                </a:solidFill>
+                <a:latin typeface="Avenir Medium" panose="02000503020000020003" pitchFamily="2" charset="0"/>
+                <a:ea typeface="Bodoni Ornaments" pitchFamily="2" charset="0"/>
+              </a:rPr>
+              <a:t> </a:t>
+            </a:r>
+          </a:p>
+          <a:p>
+            <a:endParaRPr lang="en-US" sz="5400" dirty="0">
+              <a:solidFill>
+                <a:schemeClr val="bg1"/>
+              </a:solidFill>
+              <a:latin typeface="Avenir Medium" panose="02000503020000020003" pitchFamily="2" charset="0"/>
+              <a:ea typeface="Bodoni Ornaments" pitchFamily="2" charset="0"/>
+            </a:endParaRPr>
+          </a:p>
+          <a:p>
+            <a:r>
+              <a:rPr lang="en-US" sz="5400" dirty="0">
+                <a:solidFill>
+                  <a:schemeClr val="bg1"/>
+                </a:solidFill>
+                <a:latin typeface="Avenir Medium" panose="02000503020000020003" pitchFamily="2" charset="0"/>
+                <a:ea typeface="Bodoni Ornaments" pitchFamily="2" charset="0"/>
+              </a:rPr>
+              <a:t>Our sins they are many, </a:t>
+            </a:r>
+          </a:p>
+          <a:p>
+            <a:r>
+              <a:rPr lang="en-US" sz="5400" dirty="0">
+                <a:solidFill>
+                  <a:schemeClr val="bg1"/>
+                </a:solidFill>
+                <a:latin typeface="Avenir Medium" panose="02000503020000020003" pitchFamily="2" charset="0"/>
+                <a:ea typeface="Bodoni Ornaments" pitchFamily="2" charset="0"/>
+              </a:rPr>
+              <a:t>His mercy is more</a:t>
+            </a:r>
+          </a:p>
+          <a:p>
+            <a:endParaRPr lang="en-US" sz="5400" dirty="0">
+              <a:solidFill>
+                <a:schemeClr val="bg1"/>
+              </a:solidFill>
+              <a:latin typeface="Avenir Medium" panose="02000503020000020003" pitchFamily="2" charset="0"/>
+              <a:ea typeface="Bodoni Ornaments" pitchFamily="2" charset="0"/>
+            </a:endParaRPr>
+          </a:p>
+          <a:p>
+            <a:endParaRPr lang="en-US" sz="5400" dirty="0">
+              <a:solidFill>
+                <a:schemeClr val="bg1"/>
+              </a:solidFill>
+              <a:latin typeface="Avenir Medium" panose="02000503020000020003" pitchFamily="2" charset="0"/>
+              <a:ea typeface="Bodoni Ornaments" pitchFamily="2" charset="0"/>
+            </a:endParaRPr>
+          </a:p>
+          <a:p>
+            <a:endParaRPr lang="en-US" sz="5400" dirty="0">
+              <a:solidFill>
+                <a:schemeClr val="bg1"/>
+              </a:solidFill>
+              <a:latin typeface="Avenir Medium" panose="02000503020000020003" pitchFamily="2" charset="0"/>
+              <a:ea typeface="Bodoni Ornaments" pitchFamily="2" charset="0"/>
+            </a:endParaRPr>
+          </a:p>
+        </p:txBody>
+      </p:sp>
+    </p:spTree>
+    <p:extLst>
+      <p:ext uri="{BB962C8B-B14F-4D97-AF65-F5344CB8AC3E}">
+        <p14:creationId xmlns:p14="http://schemas.microsoft.com/office/powerpoint/2010/main" val="1929563006"/>
+      </p:ext>
+    </p:extLst>
+  </p:cSld>
+  <p:clrMapOvr>
+    <a:masterClrMapping/>
+  </p:clrMapOvr>
+</p:sld>
+</file>
+
+<file path=ppt/slides/slide12.xml><?xml version="1.0" encoding="utf-8"?>
+<p:sld xmlns:a="http://schemas.openxmlformats.org/drawingml/2006/main" xmlns:r="http://schemas.openxmlformats.org/officeDocument/2006/relationships" xmlns:p="http://schemas.openxmlformats.org/presentationml/2006/main">
+  <p:cSld>
+    <p:bg>
+      <p:bgPr>
+        <a:solidFill>
+          <a:schemeClr val="tx1"/>
+        </a:solidFill>
+        <a:effectLst/>
+      </p:bgPr>
+    </p:bg>
+    <p:spTree>
+      <p:nvGrpSpPr>
+        <p:cNvPr id="1" name="">
+          <a:extLst>
+            <a:ext uri="{FF2B5EF4-FFF2-40B4-BE49-F238E27FC236}">
+              <a16:creationId xmlns:a16="http://schemas.microsoft.com/office/drawing/2014/main" id="{0CD036F9-AB35-4E75-9880-ADCDD5BD4FAA}"/>
+            </a:ext>
+          </a:extLst>
+        </p:cNvPr>
+        <p:cNvGrpSpPr/>
+        <p:nvPr/>
+      </p:nvGrpSpPr>
+      <p:grpSpPr>
+        <a:xfrm>
+          <a:off x="0" y="0"/>
+          <a:ext cx="0" cy="0"/>
+          <a:chOff x="0" y="0"/>
+          <a:chExt cx="0" cy="0"/>
+        </a:xfrm>
+      </p:grpSpPr>
+      <p:sp>
+        <p:nvSpPr>
+          <p:cNvPr id="3" name="Subtitle 2">
+            <a:extLst>
+              <a:ext uri="{FF2B5EF4-FFF2-40B4-BE49-F238E27FC236}">
+                <a16:creationId xmlns:a16="http://schemas.microsoft.com/office/drawing/2014/main" id="{62E7E448-C72E-8A6E-E063-E00AE74682C4}"/>
+              </a:ext>
+            </a:extLst>
+          </p:cNvPr>
+          <p:cNvSpPr>
+            <a:spLocks noGrp="1"/>
+          </p:cNvSpPr>
+          <p:nvPr>
+            <p:ph type="subTitle" idx="1"/>
+          </p:nvPr>
+        </p:nvSpPr>
+        <p:spPr>
+          <a:xfrm>
+            <a:off x="84221" y="213360"/>
+            <a:ext cx="8891337" cy="6416040"/>
+          </a:xfrm>
+        </p:spPr>
+        <p:txBody>
+          <a:bodyPr>
+            <a:noAutofit/>
+          </a:bodyPr>
+          <a:lstStyle/>
+          <a:p>
+            <a:endParaRPr lang="en-US" sz="5400" dirty="0">
+              <a:solidFill>
+                <a:schemeClr val="bg1"/>
+              </a:solidFill>
+              <a:latin typeface="Avenir Medium" panose="02000503020000020003" pitchFamily="2" charset="0"/>
+              <a:ea typeface="Bodoni Ornaments" pitchFamily="2" charset="0"/>
+            </a:endParaRPr>
+          </a:p>
+          <a:p>
+            <a:r>
+              <a:rPr lang="en-US" sz="5400" dirty="0">
+                <a:solidFill>
+                  <a:schemeClr val="bg1"/>
+                </a:solidFill>
+                <a:latin typeface="Avenir Medium" panose="02000503020000020003" pitchFamily="2" charset="0"/>
+                <a:ea typeface="Bodoni Ornaments" pitchFamily="2" charset="0"/>
+              </a:rPr>
+              <a:t>What riches of kindness </a:t>
+            </a:r>
+          </a:p>
+          <a:p>
+            <a:r>
+              <a:rPr lang="en-US" sz="5400" dirty="0">
+                <a:solidFill>
+                  <a:schemeClr val="bg1"/>
+                </a:solidFill>
+                <a:latin typeface="Avenir Medium" panose="02000503020000020003" pitchFamily="2" charset="0"/>
+                <a:ea typeface="Bodoni Ornaments" pitchFamily="2" charset="0"/>
+              </a:rPr>
+              <a:t>He lavished on us</a:t>
+            </a:r>
+          </a:p>
+          <a:p>
+            <a:endParaRPr lang="en-US" sz="5400" dirty="0">
+              <a:solidFill>
+                <a:schemeClr val="bg1"/>
+              </a:solidFill>
+              <a:latin typeface="Avenir Medium" panose="02000503020000020003" pitchFamily="2" charset="0"/>
+              <a:ea typeface="Bodoni Ornaments" pitchFamily="2" charset="0"/>
+            </a:endParaRPr>
+          </a:p>
+          <a:p>
+            <a:r>
+              <a:rPr lang="en-US" sz="5400" dirty="0">
+                <a:solidFill>
+                  <a:schemeClr val="bg1"/>
+                </a:solidFill>
+                <a:latin typeface="Avenir Medium" panose="02000503020000020003" pitchFamily="2" charset="0"/>
+                <a:ea typeface="Bodoni Ornaments" pitchFamily="2" charset="0"/>
+              </a:rPr>
+              <a:t>His blood was the payment, </a:t>
+            </a:r>
+          </a:p>
+          <a:p>
+            <a:r>
+              <a:rPr lang="en-US" sz="5400" dirty="0">
+                <a:solidFill>
+                  <a:schemeClr val="bg1"/>
+                </a:solidFill>
+                <a:latin typeface="Avenir Medium" panose="02000503020000020003" pitchFamily="2" charset="0"/>
+                <a:ea typeface="Bodoni Ornaments" pitchFamily="2" charset="0"/>
+              </a:rPr>
+              <a:t>His life was the cost</a:t>
+            </a:r>
+          </a:p>
+          <a:p>
+            <a:endParaRPr lang="en-US" sz="5400" dirty="0">
+              <a:solidFill>
+                <a:schemeClr val="bg1"/>
+              </a:solidFill>
+              <a:latin typeface="Avenir Medium" panose="02000503020000020003" pitchFamily="2" charset="0"/>
+              <a:ea typeface="Bodoni Ornaments" pitchFamily="2" charset="0"/>
+            </a:endParaRPr>
+          </a:p>
+        </p:txBody>
+      </p:sp>
+    </p:spTree>
+    <p:extLst>
+      <p:ext uri="{BB962C8B-B14F-4D97-AF65-F5344CB8AC3E}">
+        <p14:creationId xmlns:p14="http://schemas.microsoft.com/office/powerpoint/2010/main" val="3607307"/>
+      </p:ext>
+    </p:extLst>
+  </p:cSld>
+  <p:clrMapOvr>
+    <a:masterClrMapping/>
+  </p:clrMapOvr>
+</p:sld>
+</file>
+
+<file path=ppt/slides/slide13.xml><?xml version="1.0" encoding="utf-8"?>
+<p:sld xmlns:a="http://schemas.openxmlformats.org/drawingml/2006/main" xmlns:r="http://schemas.openxmlformats.org/officeDocument/2006/relationships" xmlns:p="http://schemas.openxmlformats.org/presentationml/2006/main">
+  <p:cSld>
+    <p:bg>
+      <p:bgPr>
+        <a:solidFill>
+          <a:schemeClr val="tx1"/>
+        </a:solidFill>
+        <a:effectLst/>
+      </p:bgPr>
+    </p:bg>
+    <p:spTree>
+      <p:nvGrpSpPr>
+        <p:cNvPr id="1" name="">
+          <a:extLst>
+            <a:ext uri="{FF2B5EF4-FFF2-40B4-BE49-F238E27FC236}">
               <a16:creationId xmlns:a16="http://schemas.microsoft.com/office/drawing/2014/main" id="{D12A5CBD-9433-55FB-9219-617D6ADC1363}"/>
             </a:ext>
           </a:extLst>
@@ -3173,17 +3654,17 @@
           </a:bodyPr>
           <a:lstStyle/>
           <a:p>
-            <a:endParaRPr lang="en-US" sz="4400" dirty="0">
-              <a:solidFill>
-                <a:schemeClr val="bg1"/>
-              </a:solidFill>
-              <a:latin typeface="Avenir Medium" panose="02000503020000020003" pitchFamily="2" charset="0"/>
-              <a:ea typeface="Bodoni Ornaments" pitchFamily="2" charset="0"/>
-            </a:endParaRPr>
-          </a:p>
-          <a:p>
-            <a:r>
-              <a:rPr lang="en-US" sz="4400" dirty="0">
+            <a:endParaRPr lang="en-US" sz="5400" dirty="0">
+              <a:solidFill>
+                <a:schemeClr val="bg1"/>
+              </a:solidFill>
+              <a:latin typeface="Avenir Medium" panose="02000503020000020003" pitchFamily="2" charset="0"/>
+              <a:ea typeface="Bodoni Ornaments" pitchFamily="2" charset="0"/>
+            </a:endParaRPr>
+          </a:p>
+          <a:p>
+            <a:r>
+              <a:rPr lang="en-US" sz="5400" dirty="0">
                 <a:solidFill>
                   <a:schemeClr val="bg1"/>
                 </a:solidFill>
@@ -3195,7 +3676,7 @@
           </a:p>
           <a:p>
             <a:r>
-              <a:rPr lang="en-US" sz="4400" dirty="0">
+              <a:rPr lang="en-US" sz="5400" dirty="0">
                 <a:solidFill>
                   <a:schemeClr val="bg1"/>
                 </a:solidFill>
@@ -3206,17 +3687,17 @@
             </a:r>
           </a:p>
           <a:p>
-            <a:endParaRPr lang="en-US" sz="4400" dirty="0">
-              <a:solidFill>
-                <a:schemeClr val="bg1"/>
-              </a:solidFill>
-              <a:latin typeface="Avenir Medium" panose="02000503020000020003" pitchFamily="2" charset="0"/>
-              <a:ea typeface="Bodoni Ornaments" pitchFamily="2" charset="0"/>
-            </a:endParaRPr>
-          </a:p>
-          <a:p>
-            <a:r>
-              <a:rPr lang="en-US" sz="4400" dirty="0">
+            <a:endParaRPr lang="en-US" sz="5400" dirty="0">
+              <a:solidFill>
+                <a:schemeClr val="bg1"/>
+              </a:solidFill>
+              <a:latin typeface="Avenir Medium" panose="02000503020000020003" pitchFamily="2" charset="0"/>
+              <a:ea typeface="Bodoni Ornaments" pitchFamily="2" charset="0"/>
+            </a:endParaRPr>
+          </a:p>
+          <a:p>
+            <a:r>
+              <a:rPr lang="en-US" sz="5400" dirty="0">
                 <a:solidFill>
                   <a:schemeClr val="bg1"/>
                 </a:solidFill>
@@ -3228,7 +3709,7 @@
           </a:p>
           <a:p>
             <a:r>
-              <a:rPr lang="en-US" sz="4400" dirty="0">
+              <a:rPr lang="en-US" sz="5400" dirty="0">
                 <a:solidFill>
                   <a:schemeClr val="bg1"/>
                 </a:solidFill>
@@ -3239,7 +3720,7 @@
             </a:r>
           </a:p>
           <a:p>
-            <a:endParaRPr lang="en-US" sz="4400" dirty="0">
+            <a:endParaRPr lang="en-US" sz="5400" dirty="0">
               <a:solidFill>
                 <a:schemeClr val="bg1"/>
               </a:solidFill>
@@ -3262,7 +3743,7 @@
 </p:sld>
 </file>
 
-<file path=ppt/slides/slide11.xml><?xml version="1.0" encoding="utf-8"?>
+<file path=ppt/slides/slide14.xml><?xml version="1.0" encoding="utf-8"?>
 <p:sld xmlns:a="http://schemas.openxmlformats.org/drawingml/2006/main" xmlns:r="http://schemas.openxmlformats.org/officeDocument/2006/relationships" xmlns:p="http://schemas.openxmlformats.org/presentationml/2006/main">
   <p:cSld>
     <p:bg>
@@ -3321,17 +3802,17 @@
           </a:bodyPr>
           <a:lstStyle/>
           <a:p>
-            <a:endParaRPr lang="en-US" sz="4400" dirty="0">
-              <a:solidFill>
-                <a:schemeClr val="bg1"/>
-              </a:solidFill>
-              <a:latin typeface="Avenir Medium" panose="02000503020000020003" pitchFamily="2" charset="0"/>
-              <a:ea typeface="Bodoni Ornaments" pitchFamily="2" charset="0"/>
-            </a:endParaRPr>
-          </a:p>
-          <a:p>
-            <a:r>
-              <a:rPr lang="en-US" sz="4400" dirty="0">
+            <a:endParaRPr lang="en-US" sz="5400" dirty="0">
+              <a:solidFill>
+                <a:schemeClr val="bg1"/>
+              </a:solidFill>
+              <a:latin typeface="Avenir Medium" panose="02000503020000020003" pitchFamily="2" charset="0"/>
+              <a:ea typeface="Bodoni Ornaments" pitchFamily="2" charset="0"/>
+            </a:endParaRPr>
+          </a:p>
+          <a:p>
+            <a:r>
+              <a:rPr lang="en-US" sz="5400" dirty="0">
                 <a:solidFill>
                   <a:schemeClr val="bg1"/>
                 </a:solidFill>
@@ -3343,7 +3824,7 @@
           </a:p>
           <a:p>
             <a:r>
-              <a:rPr lang="en-US" sz="4400" dirty="0">
+              <a:rPr lang="en-US" sz="5400" dirty="0">
                 <a:solidFill>
                   <a:schemeClr val="bg1"/>
                 </a:solidFill>
@@ -3354,17 +3835,17 @@
             </a:r>
           </a:p>
           <a:p>
-            <a:endParaRPr lang="en-US" sz="4400" dirty="0">
-              <a:solidFill>
-                <a:schemeClr val="bg1"/>
-              </a:solidFill>
-              <a:latin typeface="Avenir Medium" panose="02000503020000020003" pitchFamily="2" charset="0"/>
-              <a:ea typeface="Bodoni Ornaments" pitchFamily="2" charset="0"/>
-            </a:endParaRPr>
-          </a:p>
-          <a:p>
-            <a:r>
-              <a:rPr lang="en-US" sz="4400" dirty="0">
+            <a:endParaRPr lang="en-US" sz="5400" dirty="0">
+              <a:solidFill>
+                <a:schemeClr val="bg1"/>
+              </a:solidFill>
+              <a:latin typeface="Avenir Medium" panose="02000503020000020003" pitchFamily="2" charset="0"/>
+              <a:ea typeface="Bodoni Ornaments" pitchFamily="2" charset="0"/>
+            </a:endParaRPr>
+          </a:p>
+          <a:p>
+            <a:r>
+              <a:rPr lang="en-US" sz="5400" dirty="0">
                 <a:solidFill>
                   <a:schemeClr val="bg1"/>
                 </a:solidFill>
@@ -3376,7 +3857,7 @@
           </a:p>
           <a:p>
             <a:r>
-              <a:rPr lang="en-US" sz="4400" dirty="0">
+              <a:rPr lang="en-US" sz="5400" dirty="0">
                 <a:solidFill>
                   <a:schemeClr val="bg1"/>
                 </a:solidFill>
@@ -3387,17 +3868,147 @@
             </a:r>
           </a:p>
           <a:p>
-            <a:endParaRPr lang="en-US" sz="4400" dirty="0">
-              <a:solidFill>
-                <a:schemeClr val="bg1"/>
-              </a:solidFill>
-              <a:latin typeface="Avenir Medium" panose="02000503020000020003" pitchFamily="2" charset="0"/>
-              <a:ea typeface="Bodoni Ornaments" pitchFamily="2" charset="0"/>
-            </a:endParaRPr>
-          </a:p>
-          <a:p>
-            <a:r>
-              <a:rPr lang="en-US" sz="4400" dirty="0">
+            <a:endParaRPr lang="en-US" sz="5400" dirty="0">
+              <a:solidFill>
+                <a:schemeClr val="bg1"/>
+              </a:solidFill>
+              <a:latin typeface="Avenir Medium" panose="02000503020000020003" pitchFamily="2" charset="0"/>
+              <a:ea typeface="Bodoni Ornaments" pitchFamily="2" charset="0"/>
+            </a:endParaRPr>
+          </a:p>
+          <a:p>
+            <a:endParaRPr lang="en-US" sz="5400" dirty="0">
+              <a:solidFill>
+                <a:schemeClr val="bg1"/>
+              </a:solidFill>
+              <a:latin typeface="Avenir Medium" panose="02000503020000020003" pitchFamily="2" charset="0"/>
+              <a:ea typeface="Bodoni Ornaments" pitchFamily="2" charset="0"/>
+            </a:endParaRPr>
+          </a:p>
+          <a:p>
+            <a:endParaRPr lang="en-US" sz="5400" dirty="0">
+              <a:solidFill>
+                <a:schemeClr val="bg1"/>
+              </a:solidFill>
+              <a:latin typeface="Avenir Medium" panose="02000503020000020003" pitchFamily="2" charset="0"/>
+              <a:ea typeface="Bodoni Ornaments" pitchFamily="2" charset="0"/>
+            </a:endParaRPr>
+          </a:p>
+          <a:p>
+            <a:endParaRPr lang="en-US" sz="5400" dirty="0">
+              <a:solidFill>
+                <a:schemeClr val="bg1"/>
+              </a:solidFill>
+              <a:latin typeface="Avenir Medium" panose="02000503020000020003" pitchFamily="2" charset="0"/>
+              <a:ea typeface="Bodoni Ornaments" pitchFamily="2" charset="0"/>
+            </a:endParaRPr>
+          </a:p>
+        </p:txBody>
+      </p:sp>
+    </p:spTree>
+    <p:extLst>
+      <p:ext uri="{BB962C8B-B14F-4D97-AF65-F5344CB8AC3E}">
+        <p14:creationId xmlns:p14="http://schemas.microsoft.com/office/powerpoint/2010/main" val="3843892680"/>
+      </p:ext>
+    </p:extLst>
+  </p:cSld>
+  <p:clrMapOvr>
+    <a:masterClrMapping/>
+  </p:clrMapOvr>
+</p:sld>
+</file>
+
+<file path=ppt/slides/slide15.xml><?xml version="1.0" encoding="utf-8"?>
+<p:sld xmlns:a="http://schemas.openxmlformats.org/drawingml/2006/main" xmlns:r="http://schemas.openxmlformats.org/officeDocument/2006/relationships" xmlns:p="http://schemas.openxmlformats.org/presentationml/2006/main">
+  <p:cSld>
+    <p:bg>
+      <p:bgPr>
+        <a:solidFill>
+          <a:schemeClr val="tx1"/>
+        </a:solidFill>
+        <a:effectLst/>
+      </p:bgPr>
+    </p:bg>
+    <p:spTree>
+      <p:nvGrpSpPr>
+        <p:cNvPr id="1" name="">
+          <a:extLst>
+            <a:ext uri="{FF2B5EF4-FFF2-40B4-BE49-F238E27FC236}">
+              <a16:creationId xmlns:a16="http://schemas.microsoft.com/office/drawing/2014/main" id="{AAC99D6A-9743-D944-13B5-8563E1931E44}"/>
+            </a:ext>
+          </a:extLst>
+        </p:cNvPr>
+        <p:cNvGrpSpPr/>
+        <p:nvPr/>
+      </p:nvGrpSpPr>
+      <p:grpSpPr>
+        <a:xfrm>
+          <a:off x="0" y="0"/>
+          <a:ext cx="0" cy="0"/>
+          <a:chOff x="0" y="0"/>
+          <a:chExt cx="0" cy="0"/>
+        </a:xfrm>
+      </p:grpSpPr>
+      <p:sp>
+        <p:nvSpPr>
+          <p:cNvPr id="3" name="Subtitle 2">
+            <a:extLst>
+              <a:ext uri="{FF2B5EF4-FFF2-40B4-BE49-F238E27FC236}">
+                <a16:creationId xmlns:a16="http://schemas.microsoft.com/office/drawing/2014/main" id="{76CA1F0D-E3AB-0DCC-93B4-E23C5410E6CB}"/>
+              </a:ext>
+            </a:extLst>
+          </p:cNvPr>
+          <p:cNvSpPr>
+            <a:spLocks noGrp="1"/>
+          </p:cNvSpPr>
+          <p:nvPr>
+            <p:ph type="subTitle" idx="1"/>
+          </p:nvPr>
+        </p:nvSpPr>
+        <p:spPr>
+          <a:xfrm>
+            <a:off x="84221" y="213360"/>
+            <a:ext cx="8891337" cy="6416040"/>
+          </a:xfrm>
+        </p:spPr>
+        <p:txBody>
+          <a:bodyPr>
+            <a:noAutofit/>
+          </a:bodyPr>
+          <a:lstStyle/>
+          <a:p>
+            <a:endParaRPr lang="en-US" sz="5400" dirty="0">
+              <a:solidFill>
+                <a:schemeClr val="bg1"/>
+              </a:solidFill>
+              <a:latin typeface="Avenir Medium" panose="02000503020000020003" pitchFamily="2" charset="0"/>
+              <a:ea typeface="Bodoni Ornaments" pitchFamily="2" charset="0"/>
+            </a:endParaRPr>
+          </a:p>
+          <a:p>
+            <a:r>
+              <a:rPr lang="en-US" sz="5400" dirty="0">
+                <a:solidFill>
+                  <a:schemeClr val="bg1"/>
+                </a:solidFill>
+                <a:latin typeface="Avenir Medium" panose="02000503020000020003" pitchFamily="2" charset="0"/>
+                <a:ea typeface="Bodoni Ornaments" pitchFamily="2" charset="0"/>
+              </a:rPr>
+              <a:t> </a:t>
+            </a:r>
+          </a:p>
+          <a:p>
+            <a:endParaRPr lang="en-US" sz="5400" dirty="0">
+              <a:solidFill>
+                <a:schemeClr val="bg1"/>
+              </a:solidFill>
+              <a:latin typeface="Avenir Medium" panose="02000503020000020003" pitchFamily="2" charset="0"/>
+              <a:ea typeface="Bodoni Ornaments" pitchFamily="2" charset="0"/>
+            </a:endParaRPr>
+          </a:p>
+          <a:p>
+            <a:r>
+              <a:rPr lang="en-US" sz="5400" dirty="0">
                 <a:solidFill>
                   <a:schemeClr val="bg1"/>
                 </a:solidFill>
@@ -3409,7 +4020,7 @@
           </a:p>
           <a:p>
             <a:r>
-              <a:rPr lang="en-US" sz="4400" dirty="0">
+              <a:rPr lang="en-US" sz="5400" dirty="0">
                 <a:solidFill>
                   <a:schemeClr val="bg1"/>
                 </a:solidFill>
@@ -3420,25 +4031,25 @@
             </a:r>
           </a:p>
           <a:p>
-            <a:endParaRPr lang="en-US" sz="4400" dirty="0">
-              <a:solidFill>
-                <a:schemeClr val="bg1"/>
-              </a:solidFill>
-              <a:latin typeface="Avenir Medium" panose="02000503020000020003" pitchFamily="2" charset="0"/>
-              <a:ea typeface="Bodoni Ornaments" pitchFamily="2" charset="0"/>
-            </a:endParaRPr>
-          </a:p>
-          <a:p>
-            <a:endParaRPr lang="en-US" sz="4400" dirty="0">
-              <a:solidFill>
-                <a:schemeClr val="bg1"/>
-              </a:solidFill>
-              <a:latin typeface="Avenir Medium" panose="02000503020000020003" pitchFamily="2" charset="0"/>
-              <a:ea typeface="Bodoni Ornaments" pitchFamily="2" charset="0"/>
-            </a:endParaRPr>
-          </a:p>
-          <a:p>
-            <a:endParaRPr lang="en-US" sz="4400" dirty="0">
+            <a:endParaRPr lang="en-US" sz="5400" dirty="0">
+              <a:solidFill>
+                <a:schemeClr val="bg1"/>
+              </a:solidFill>
+              <a:latin typeface="Avenir Medium" panose="02000503020000020003" pitchFamily="2" charset="0"/>
+              <a:ea typeface="Bodoni Ornaments" pitchFamily="2" charset="0"/>
+            </a:endParaRPr>
+          </a:p>
+          <a:p>
+            <a:endParaRPr lang="en-US" sz="5400" dirty="0">
+              <a:solidFill>
+                <a:schemeClr val="bg1"/>
+              </a:solidFill>
+              <a:latin typeface="Avenir Medium" panose="02000503020000020003" pitchFamily="2" charset="0"/>
+              <a:ea typeface="Bodoni Ornaments" pitchFamily="2" charset="0"/>
+            </a:endParaRPr>
+          </a:p>
+          <a:p>
+            <a:endParaRPr lang="en-US" sz="5400" dirty="0">
               <a:solidFill>
                 <a:schemeClr val="bg1"/>
               </a:solidFill>
@@ -3451,7 +4062,7 @@
     </p:spTree>
     <p:extLst>
       <p:ext uri="{BB962C8B-B14F-4D97-AF65-F5344CB8AC3E}">
-        <p14:creationId xmlns:p14="http://schemas.microsoft.com/office/powerpoint/2010/main" val="3843892680"/>
+        <p14:creationId xmlns:p14="http://schemas.microsoft.com/office/powerpoint/2010/main" val="2594615069"/>
       </p:ext>
     </p:extLst>
   </p:cSld>
@@ -3520,17 +4131,17 @@
           </a:bodyPr>
           <a:lstStyle/>
           <a:p>
-            <a:endParaRPr lang="en-US" sz="4400" dirty="0">
-              <a:solidFill>
-                <a:schemeClr val="bg1"/>
-              </a:solidFill>
-              <a:latin typeface="Avenir Medium" panose="02000503020000020003" pitchFamily="2" charset="0"/>
-              <a:ea typeface="Bodoni Ornaments" pitchFamily="2" charset="0"/>
-            </a:endParaRPr>
-          </a:p>
-          <a:p>
-            <a:r>
-              <a:rPr lang="en-US" sz="4400" dirty="0">
+            <a:endParaRPr lang="en-US" sz="5400" dirty="0">
+              <a:solidFill>
+                <a:schemeClr val="bg1"/>
+              </a:solidFill>
+              <a:latin typeface="Avenir Medium" panose="02000503020000020003" pitchFamily="2" charset="0"/>
+              <a:ea typeface="Bodoni Ornaments" pitchFamily="2" charset="0"/>
+            </a:endParaRPr>
+          </a:p>
+          <a:p>
+            <a:r>
+              <a:rPr lang="en-US" sz="5400" dirty="0">
                 <a:solidFill>
                   <a:schemeClr val="bg1"/>
                 </a:solidFill>
@@ -3542,7 +4153,7 @@
           </a:p>
           <a:p>
             <a:r>
-              <a:rPr lang="en-US" sz="4400" dirty="0">
+              <a:rPr lang="en-US" sz="5400" dirty="0">
                 <a:solidFill>
                   <a:schemeClr val="bg1"/>
                 </a:solidFill>
@@ -3553,17 +4164,17 @@
             </a:r>
           </a:p>
           <a:p>
-            <a:endParaRPr lang="en-US" sz="4400" dirty="0">
-              <a:solidFill>
-                <a:schemeClr val="bg1"/>
-              </a:solidFill>
-              <a:latin typeface="Avenir Medium" panose="02000503020000020003" pitchFamily="2" charset="0"/>
-              <a:ea typeface="Bodoni Ornaments" pitchFamily="2" charset="0"/>
-            </a:endParaRPr>
-          </a:p>
-          <a:p>
-            <a:r>
-              <a:rPr lang="en-US" sz="4400" dirty="0">
+            <a:endParaRPr lang="en-US" sz="5400" dirty="0">
+              <a:solidFill>
+                <a:schemeClr val="bg1"/>
+              </a:solidFill>
+              <a:latin typeface="Avenir Medium" panose="02000503020000020003" pitchFamily="2" charset="0"/>
+              <a:ea typeface="Bodoni Ornaments" pitchFamily="2" charset="0"/>
+            </a:endParaRPr>
+          </a:p>
+          <a:p>
+            <a:r>
+              <a:rPr lang="en-US" sz="5400" dirty="0">
                 <a:solidFill>
                   <a:schemeClr val="bg1"/>
                 </a:solidFill>
@@ -3575,7 +4186,7 @@
           </a:p>
           <a:p>
             <a:r>
-              <a:rPr lang="en-US" sz="4400" dirty="0">
+              <a:rPr lang="en-US" sz="5400" dirty="0">
                 <a:solidFill>
                   <a:schemeClr val="bg1"/>
                 </a:solidFill>
@@ -3586,58 +4197,34 @@
             </a:r>
           </a:p>
           <a:p>
-            <a:endParaRPr lang="en-US" sz="4400" dirty="0">
-              <a:solidFill>
-                <a:schemeClr val="bg1"/>
-              </a:solidFill>
-              <a:latin typeface="Avenir Medium" panose="02000503020000020003" pitchFamily="2" charset="0"/>
-              <a:ea typeface="Bodoni Ornaments" pitchFamily="2" charset="0"/>
-            </a:endParaRPr>
-          </a:p>
-          <a:p>
-            <a:r>
-              <a:rPr lang="en-US" sz="4400" dirty="0">
-                <a:solidFill>
-                  <a:schemeClr val="bg1"/>
-                </a:solidFill>
-                <a:latin typeface="Avenir Medium" panose="02000503020000020003" pitchFamily="2" charset="0"/>
-                <a:ea typeface="Bodoni Ornaments" pitchFamily="2" charset="0"/>
-              </a:rPr>
-              <a:t>Our sins they are many, </a:t>
-            </a:r>
-          </a:p>
-          <a:p>
-            <a:r>
-              <a:rPr lang="en-US" sz="4400" dirty="0">
-                <a:solidFill>
-                  <a:schemeClr val="bg1"/>
-                </a:solidFill>
-                <a:latin typeface="Avenir Medium" panose="02000503020000020003" pitchFamily="2" charset="0"/>
-                <a:ea typeface="Bodoni Ornaments" pitchFamily="2" charset="0"/>
-              </a:rPr>
-              <a:t>His mercy is more</a:t>
-            </a:r>
-          </a:p>
-          <a:p>
-            <a:endParaRPr lang="en-US" sz="4400" dirty="0">
-              <a:solidFill>
-                <a:schemeClr val="bg1"/>
-              </a:solidFill>
-              <a:latin typeface="Avenir Medium" panose="02000503020000020003" pitchFamily="2" charset="0"/>
-              <a:ea typeface="Bodoni Ornaments" pitchFamily="2" charset="0"/>
-            </a:endParaRPr>
-          </a:p>
-          <a:p>
-            <a:endParaRPr lang="en-US" sz="4400" dirty="0">
-              <a:solidFill>
-                <a:schemeClr val="bg1"/>
-              </a:solidFill>
-              <a:latin typeface="Avenir Medium" panose="02000503020000020003" pitchFamily="2" charset="0"/>
-              <a:ea typeface="Bodoni Ornaments" pitchFamily="2" charset="0"/>
-            </a:endParaRPr>
-          </a:p>
-          <a:p>
-            <a:endParaRPr lang="en-US" sz="4400" dirty="0">
+            <a:endParaRPr lang="en-US" sz="5400" dirty="0">
+              <a:solidFill>
+                <a:schemeClr val="bg1"/>
+              </a:solidFill>
+              <a:latin typeface="Avenir Medium" panose="02000503020000020003" pitchFamily="2" charset="0"/>
+              <a:ea typeface="Bodoni Ornaments" pitchFamily="2" charset="0"/>
+            </a:endParaRPr>
+          </a:p>
+          <a:p>
+            <a:endParaRPr lang="en-US" sz="5400" dirty="0">
+              <a:solidFill>
+                <a:schemeClr val="bg1"/>
+              </a:solidFill>
+              <a:latin typeface="Avenir Medium" panose="02000503020000020003" pitchFamily="2" charset="0"/>
+              <a:ea typeface="Bodoni Ornaments" pitchFamily="2" charset="0"/>
+            </a:endParaRPr>
+          </a:p>
+          <a:p>
+            <a:endParaRPr lang="en-US" sz="5400" dirty="0">
+              <a:solidFill>
+                <a:schemeClr val="bg1"/>
+              </a:solidFill>
+              <a:latin typeface="Avenir Medium" panose="02000503020000020003" pitchFamily="2" charset="0"/>
+              <a:ea typeface="Bodoni Ornaments" pitchFamily="2" charset="0"/>
+            </a:endParaRPr>
+          </a:p>
+          <a:p>
+            <a:endParaRPr lang="en-US" sz="5400" dirty="0">
               <a:solidFill>
                 <a:schemeClr val="bg1"/>
               </a:solidFill>
@@ -3650,7 +4237,7 @@
     </p:spTree>
     <p:extLst>
       <p:ext uri="{BB962C8B-B14F-4D97-AF65-F5344CB8AC3E}">
-        <p14:creationId xmlns:p14="http://schemas.microsoft.com/office/powerpoint/2010/main" val="2164526557"/>
+        <p14:creationId xmlns:p14="http://schemas.microsoft.com/office/powerpoint/2010/main" val="2322217743"/>
       </p:ext>
     </p:extLst>
   </p:cSld>
@@ -3661,6 +4248,139 @@
 </file>
 
 <file path=ppt/slides/slide3.xml><?xml version="1.0" encoding="utf-8"?>
+<p:sld xmlns:a="http://schemas.openxmlformats.org/drawingml/2006/main" xmlns:r="http://schemas.openxmlformats.org/officeDocument/2006/relationships" xmlns:p="http://schemas.openxmlformats.org/presentationml/2006/main">
+  <p:cSld>
+    <p:bg>
+      <p:bgPr>
+        <a:solidFill>
+          <a:schemeClr val="tx1"/>
+        </a:solidFill>
+        <a:effectLst/>
+      </p:bgPr>
+    </p:bg>
+    <p:spTree>
+      <p:nvGrpSpPr>
+        <p:cNvPr id="1" name="">
+          <a:extLst>
+            <a:ext uri="{FF2B5EF4-FFF2-40B4-BE49-F238E27FC236}">
+              <a16:creationId xmlns:a16="http://schemas.microsoft.com/office/drawing/2014/main" id="{A9C5A513-637B-C2B6-C88D-F4AC4F0EBC8D}"/>
+            </a:ext>
+          </a:extLst>
+        </p:cNvPr>
+        <p:cNvGrpSpPr/>
+        <p:nvPr/>
+      </p:nvGrpSpPr>
+      <p:grpSpPr>
+        <a:xfrm>
+          <a:off x="0" y="0"/>
+          <a:ext cx="0" cy="0"/>
+          <a:chOff x="0" y="0"/>
+          <a:chExt cx="0" cy="0"/>
+        </a:xfrm>
+      </p:grpSpPr>
+      <p:sp>
+        <p:nvSpPr>
+          <p:cNvPr id="3" name="Subtitle 2">
+            <a:extLst>
+              <a:ext uri="{FF2B5EF4-FFF2-40B4-BE49-F238E27FC236}">
+                <a16:creationId xmlns:a16="http://schemas.microsoft.com/office/drawing/2014/main" id="{26C2DD1A-506B-90A2-1E57-48083D1175A3}"/>
+              </a:ext>
+            </a:extLst>
+          </p:cNvPr>
+          <p:cNvSpPr>
+            <a:spLocks noGrp="1"/>
+          </p:cNvSpPr>
+          <p:nvPr>
+            <p:ph type="subTitle" idx="1"/>
+          </p:nvPr>
+        </p:nvSpPr>
+        <p:spPr>
+          <a:xfrm>
+            <a:off x="84221" y="213360"/>
+            <a:ext cx="8891337" cy="6416040"/>
+          </a:xfrm>
+        </p:spPr>
+        <p:txBody>
+          <a:bodyPr>
+            <a:noAutofit/>
+          </a:bodyPr>
+          <a:lstStyle/>
+          <a:p>
+            <a:endParaRPr lang="en-US" sz="5400" dirty="0">
+              <a:solidFill>
+                <a:schemeClr val="bg1"/>
+              </a:solidFill>
+              <a:latin typeface="Avenir Medium" panose="02000503020000020003" pitchFamily="2" charset="0"/>
+              <a:ea typeface="Bodoni Ornaments" pitchFamily="2" charset="0"/>
+            </a:endParaRPr>
+          </a:p>
+          <a:p>
+            <a:r>
+              <a:rPr lang="en-US" sz="5400" dirty="0">
+                <a:solidFill>
+                  <a:schemeClr val="bg1"/>
+                </a:solidFill>
+                <a:latin typeface="Avenir Medium" panose="02000503020000020003" pitchFamily="2" charset="0"/>
+                <a:ea typeface="Bodoni Ornaments" pitchFamily="2" charset="0"/>
+              </a:rPr>
+              <a:t>Our sins they are many, </a:t>
+            </a:r>
+          </a:p>
+          <a:p>
+            <a:r>
+              <a:rPr lang="en-US" sz="5400" dirty="0">
+                <a:solidFill>
+                  <a:schemeClr val="bg1"/>
+                </a:solidFill>
+                <a:latin typeface="Avenir Medium" panose="02000503020000020003" pitchFamily="2" charset="0"/>
+                <a:ea typeface="Bodoni Ornaments" pitchFamily="2" charset="0"/>
+              </a:rPr>
+              <a:t>His mercy is more</a:t>
+            </a:r>
+          </a:p>
+          <a:p>
+            <a:endParaRPr lang="en-US" sz="5400" dirty="0">
+              <a:solidFill>
+                <a:schemeClr val="bg1"/>
+              </a:solidFill>
+              <a:latin typeface="Avenir Medium" panose="02000503020000020003" pitchFamily="2" charset="0"/>
+              <a:ea typeface="Bodoni Ornaments" pitchFamily="2" charset="0"/>
+            </a:endParaRPr>
+          </a:p>
+          <a:p>
+            <a:endParaRPr lang="en-US" sz="5400" dirty="0">
+              <a:solidFill>
+                <a:schemeClr val="bg1"/>
+              </a:solidFill>
+              <a:latin typeface="Avenir Medium" panose="02000503020000020003" pitchFamily="2" charset="0"/>
+              <a:ea typeface="Bodoni Ornaments" pitchFamily="2" charset="0"/>
+            </a:endParaRPr>
+          </a:p>
+          <a:p>
+            <a:endParaRPr lang="en-US" sz="5400" dirty="0">
+              <a:solidFill>
+                <a:schemeClr val="bg1"/>
+              </a:solidFill>
+              <a:latin typeface="Avenir Medium" panose="02000503020000020003" pitchFamily="2" charset="0"/>
+              <a:ea typeface="Bodoni Ornaments" pitchFamily="2" charset="0"/>
+            </a:endParaRPr>
+          </a:p>
+        </p:txBody>
+      </p:sp>
+    </p:spTree>
+    <p:extLst>
+      <p:ext uri="{BB962C8B-B14F-4D97-AF65-F5344CB8AC3E}">
+        <p14:creationId xmlns:p14="http://schemas.microsoft.com/office/powerpoint/2010/main" val="235623718"/>
+      </p:ext>
+    </p:extLst>
+  </p:cSld>
+  <p:clrMapOvr>
+    <a:masterClrMapping/>
+  </p:clrMapOvr>
+</p:sld>
+</file>
+
+<file path=ppt/slides/slide4.xml><?xml version="1.0" encoding="utf-8"?>
 <p:sld xmlns:a="http://schemas.openxmlformats.org/drawingml/2006/main" xmlns:r="http://schemas.openxmlformats.org/officeDocument/2006/relationships" xmlns:p="http://schemas.openxmlformats.org/presentationml/2006/main">
   <p:cSld>
     <p:bg>
@@ -3719,26 +4439,17 @@
           </a:bodyPr>
           <a:lstStyle/>
           <a:p>
-            <a:endParaRPr lang="en-US" sz="4400" dirty="0">
-              <a:solidFill>
-                <a:schemeClr val="bg1"/>
-              </a:solidFill>
-              <a:latin typeface="Avenir Medium" panose="02000503020000020003" pitchFamily="2" charset="0"/>
-              <a:ea typeface="Bodoni Ornaments" pitchFamily="2" charset="0"/>
-            </a:endParaRPr>
-          </a:p>
-          <a:p>
-            <a:endParaRPr lang="en-US" sz="4400" dirty="0">
-              <a:solidFill>
-                <a:schemeClr val="bg1"/>
-              </a:solidFill>
-              <a:latin typeface="Avenir Medium" panose="02000503020000020003" pitchFamily="2" charset="0"/>
-              <a:ea typeface="Bodoni Ornaments" pitchFamily="2" charset="0"/>
-            </a:endParaRPr>
-          </a:p>
-          <a:p>
-            <a:r>
-              <a:rPr lang="en-US" sz="4400" dirty="0">
+            <a:endParaRPr lang="en-US" sz="5400" dirty="0">
+              <a:solidFill>
+                <a:schemeClr val="bg1"/>
+              </a:solidFill>
+              <a:latin typeface="Avenir Medium" panose="02000503020000020003" pitchFamily="2" charset="0"/>
+              <a:ea typeface="Bodoni Ornaments" pitchFamily="2" charset="0"/>
+            </a:endParaRPr>
+          </a:p>
+          <a:p>
+            <a:r>
+              <a:rPr lang="en-US" sz="5400" dirty="0">
                 <a:solidFill>
                   <a:schemeClr val="bg1"/>
                 </a:solidFill>
@@ -3750,7 +4461,7 @@
           </a:p>
           <a:p>
             <a:r>
-              <a:rPr lang="en-US" sz="4400" dirty="0">
+              <a:rPr lang="en-US" sz="5400" dirty="0">
                 <a:solidFill>
                   <a:schemeClr val="bg1"/>
                 </a:solidFill>
@@ -3761,17 +4472,17 @@
             </a:r>
           </a:p>
           <a:p>
-            <a:endParaRPr lang="en-US" sz="4400" dirty="0">
-              <a:solidFill>
-                <a:schemeClr val="bg1"/>
-              </a:solidFill>
-              <a:latin typeface="Avenir Medium" panose="02000503020000020003" pitchFamily="2" charset="0"/>
-              <a:ea typeface="Bodoni Ornaments" pitchFamily="2" charset="0"/>
-            </a:endParaRPr>
-          </a:p>
-          <a:p>
-            <a:r>
-              <a:rPr lang="en-US" sz="4400" dirty="0">
+            <a:endParaRPr lang="en-US" sz="5400" dirty="0">
+              <a:solidFill>
+                <a:schemeClr val="bg1"/>
+              </a:solidFill>
+              <a:latin typeface="Avenir Medium" panose="02000503020000020003" pitchFamily="2" charset="0"/>
+              <a:ea typeface="Bodoni Ornaments" pitchFamily="2" charset="0"/>
+            </a:endParaRPr>
+          </a:p>
+          <a:p>
+            <a:r>
+              <a:rPr lang="en-US" sz="5400" dirty="0">
                 <a:solidFill>
                   <a:schemeClr val="bg1"/>
                 </a:solidFill>
@@ -3783,7 +4494,7 @@
           </a:p>
           <a:p>
             <a:r>
-              <a:rPr lang="en-US" sz="4400" dirty="0">
+              <a:rPr lang="en-US" sz="5400" dirty="0">
                 <a:solidFill>
                   <a:schemeClr val="bg1"/>
                 </a:solidFill>
@@ -3794,7 +4505,7 @@
             </a:r>
           </a:p>
           <a:p>
-            <a:endParaRPr lang="en-US" sz="4400" dirty="0">
+            <a:endParaRPr lang="en-US" sz="5400" dirty="0">
               <a:solidFill>
                 <a:schemeClr val="bg1"/>
               </a:solidFill>
@@ -3817,7 +4528,7 @@
 </p:sld>
 </file>
 
-<file path=ppt/slides/slide4.xml><?xml version="1.0" encoding="utf-8"?>
+<file path=ppt/slides/slide5.xml><?xml version="1.0" encoding="utf-8"?>
 <p:sld xmlns:a="http://schemas.openxmlformats.org/drawingml/2006/main" xmlns:r="http://schemas.openxmlformats.org/officeDocument/2006/relationships" xmlns:p="http://schemas.openxmlformats.org/presentationml/2006/main">
   <p:cSld>
     <p:bg>
@@ -3876,17 +4587,17 @@
           </a:bodyPr>
           <a:lstStyle/>
           <a:p>
-            <a:endParaRPr lang="en-US" sz="4400" dirty="0">
-              <a:solidFill>
-                <a:schemeClr val="bg1"/>
-              </a:solidFill>
-              <a:latin typeface="Avenir Medium" panose="02000503020000020003" pitchFamily="2" charset="0"/>
-              <a:ea typeface="Bodoni Ornaments" pitchFamily="2" charset="0"/>
-            </a:endParaRPr>
-          </a:p>
-          <a:p>
-            <a:r>
-              <a:rPr lang="en-US" sz="4400" dirty="0">
+            <a:endParaRPr lang="en-US" sz="5400" dirty="0">
+              <a:solidFill>
+                <a:schemeClr val="bg1"/>
+              </a:solidFill>
+              <a:latin typeface="Avenir Medium" panose="02000503020000020003" pitchFamily="2" charset="0"/>
+              <a:ea typeface="Bodoni Ornaments" pitchFamily="2" charset="0"/>
+            </a:endParaRPr>
+          </a:p>
+          <a:p>
+            <a:r>
+              <a:rPr lang="en-US" sz="5400" dirty="0">
                 <a:solidFill>
                   <a:schemeClr val="bg1"/>
                 </a:solidFill>
@@ -3898,7 +4609,7 @@
           </a:p>
           <a:p>
             <a:r>
-              <a:rPr lang="en-US" sz="4400" dirty="0">
+              <a:rPr lang="en-US" sz="5400" dirty="0">
                 <a:solidFill>
                   <a:schemeClr val="bg1"/>
                 </a:solidFill>
@@ -3909,17 +4620,17 @@
             </a:r>
           </a:p>
           <a:p>
-            <a:endParaRPr lang="en-US" sz="4400" dirty="0">
-              <a:solidFill>
-                <a:schemeClr val="bg1"/>
-              </a:solidFill>
-              <a:latin typeface="Avenir Medium" panose="02000503020000020003" pitchFamily="2" charset="0"/>
-              <a:ea typeface="Bodoni Ornaments" pitchFamily="2" charset="0"/>
-            </a:endParaRPr>
-          </a:p>
-          <a:p>
-            <a:r>
-              <a:rPr lang="en-US" sz="4400" dirty="0">
+            <a:endParaRPr lang="en-US" sz="5400" dirty="0">
+              <a:solidFill>
+                <a:schemeClr val="bg1"/>
+              </a:solidFill>
+              <a:latin typeface="Avenir Medium" panose="02000503020000020003" pitchFamily="2" charset="0"/>
+              <a:ea typeface="Bodoni Ornaments" pitchFamily="2" charset="0"/>
+            </a:endParaRPr>
+          </a:p>
+          <a:p>
+            <a:r>
+              <a:rPr lang="en-US" sz="5400" dirty="0">
                 <a:solidFill>
                   <a:schemeClr val="bg1"/>
                 </a:solidFill>
@@ -3931,7 +4642,7 @@
           </a:p>
           <a:p>
             <a:r>
-              <a:rPr lang="en-US" sz="4400" dirty="0">
+              <a:rPr lang="en-US" sz="5400" dirty="0">
                 <a:solidFill>
                   <a:schemeClr val="bg1"/>
                 </a:solidFill>
@@ -3942,7 +4653,7 @@
             </a:r>
           </a:p>
           <a:p>
-            <a:endParaRPr lang="en-US" sz="4400" dirty="0">
+            <a:endParaRPr lang="en-US" sz="5400" dirty="0">
               <a:solidFill>
                 <a:schemeClr val="bg1"/>
               </a:solidFill>
@@ -3965,7 +4676,7 @@
 </p:sld>
 </file>
 
-<file path=ppt/slides/slide5.xml><?xml version="1.0" encoding="utf-8"?>
+<file path=ppt/slides/slide6.xml><?xml version="1.0" encoding="utf-8"?>
 <p:sld xmlns:a="http://schemas.openxmlformats.org/drawingml/2006/main" xmlns:r="http://schemas.openxmlformats.org/officeDocument/2006/relationships" xmlns:p="http://schemas.openxmlformats.org/presentationml/2006/main">
   <p:cSld>
     <p:bg>
@@ -4024,17 +4735,17 @@
           </a:bodyPr>
           <a:lstStyle/>
           <a:p>
-            <a:endParaRPr lang="en-US" sz="4400" dirty="0">
-              <a:solidFill>
-                <a:schemeClr val="bg1"/>
-              </a:solidFill>
-              <a:latin typeface="Avenir Medium" panose="02000503020000020003" pitchFamily="2" charset="0"/>
-              <a:ea typeface="Bodoni Ornaments" pitchFamily="2" charset="0"/>
-            </a:endParaRPr>
-          </a:p>
-          <a:p>
-            <a:r>
-              <a:rPr lang="en-US" sz="4400" dirty="0">
+            <a:endParaRPr lang="en-US" sz="5400" dirty="0">
+              <a:solidFill>
+                <a:schemeClr val="bg1"/>
+              </a:solidFill>
+              <a:latin typeface="Avenir Medium" panose="02000503020000020003" pitchFamily="2" charset="0"/>
+              <a:ea typeface="Bodoni Ornaments" pitchFamily="2" charset="0"/>
+            </a:endParaRPr>
+          </a:p>
+          <a:p>
+            <a:r>
+              <a:rPr lang="en-US" sz="5400" dirty="0">
                 <a:solidFill>
                   <a:schemeClr val="bg1"/>
                 </a:solidFill>
@@ -4046,7 +4757,7 @@
           </a:p>
           <a:p>
             <a:r>
-              <a:rPr lang="en-US" sz="4400" dirty="0">
+              <a:rPr lang="en-US" sz="5400" dirty="0">
                 <a:solidFill>
                   <a:schemeClr val="bg1"/>
                 </a:solidFill>
@@ -4057,17 +4768,17 @@
             </a:r>
           </a:p>
           <a:p>
-            <a:endParaRPr lang="en-US" sz="4400" dirty="0">
-              <a:solidFill>
-                <a:schemeClr val="bg1"/>
-              </a:solidFill>
-              <a:latin typeface="Avenir Medium" panose="02000503020000020003" pitchFamily="2" charset="0"/>
-              <a:ea typeface="Bodoni Ornaments" pitchFamily="2" charset="0"/>
-            </a:endParaRPr>
-          </a:p>
-          <a:p>
-            <a:r>
-              <a:rPr lang="en-US" sz="4400" dirty="0">
+            <a:endParaRPr lang="en-US" sz="5400" dirty="0">
+              <a:solidFill>
+                <a:schemeClr val="bg1"/>
+              </a:solidFill>
+              <a:latin typeface="Avenir Medium" panose="02000503020000020003" pitchFamily="2" charset="0"/>
+              <a:ea typeface="Bodoni Ornaments" pitchFamily="2" charset="0"/>
+            </a:endParaRPr>
+          </a:p>
+          <a:p>
+            <a:r>
+              <a:rPr lang="en-US" sz="5400" dirty="0">
                 <a:solidFill>
                   <a:schemeClr val="bg1"/>
                 </a:solidFill>
@@ -4079,7 +4790,7 @@
           </a:p>
           <a:p>
             <a:r>
-              <a:rPr lang="en-US" sz="4400" dirty="0">
+              <a:rPr lang="en-US" sz="5400" dirty="0">
                 <a:solidFill>
                   <a:schemeClr val="bg1"/>
                 </a:solidFill>
@@ -4090,58 +4801,34 @@
             </a:r>
           </a:p>
           <a:p>
-            <a:endParaRPr lang="en-US" sz="4400" dirty="0">
-              <a:solidFill>
-                <a:schemeClr val="bg1"/>
-              </a:solidFill>
-              <a:latin typeface="Avenir Medium" panose="02000503020000020003" pitchFamily="2" charset="0"/>
-              <a:ea typeface="Bodoni Ornaments" pitchFamily="2" charset="0"/>
-            </a:endParaRPr>
-          </a:p>
-          <a:p>
-            <a:r>
-              <a:rPr lang="en-US" sz="4400" dirty="0">
-                <a:solidFill>
-                  <a:schemeClr val="bg1"/>
-                </a:solidFill>
-                <a:latin typeface="Avenir Medium" panose="02000503020000020003" pitchFamily="2" charset="0"/>
-                <a:ea typeface="Bodoni Ornaments" pitchFamily="2" charset="0"/>
-              </a:rPr>
-              <a:t>Our sins they are many, </a:t>
-            </a:r>
-          </a:p>
-          <a:p>
-            <a:r>
-              <a:rPr lang="en-US" sz="4400" dirty="0">
-                <a:solidFill>
-                  <a:schemeClr val="bg1"/>
-                </a:solidFill>
-                <a:latin typeface="Avenir Medium" panose="02000503020000020003" pitchFamily="2" charset="0"/>
-                <a:ea typeface="Bodoni Ornaments" pitchFamily="2" charset="0"/>
-              </a:rPr>
-              <a:t>His mercy is more</a:t>
-            </a:r>
-          </a:p>
-          <a:p>
-            <a:endParaRPr lang="en-US" sz="4400" dirty="0">
-              <a:solidFill>
-                <a:schemeClr val="bg1"/>
-              </a:solidFill>
-              <a:latin typeface="Avenir Medium" panose="02000503020000020003" pitchFamily="2" charset="0"/>
-              <a:ea typeface="Bodoni Ornaments" pitchFamily="2" charset="0"/>
-            </a:endParaRPr>
-          </a:p>
-          <a:p>
-            <a:endParaRPr lang="en-US" sz="4400" dirty="0">
-              <a:solidFill>
-                <a:schemeClr val="bg1"/>
-              </a:solidFill>
-              <a:latin typeface="Avenir Medium" panose="02000503020000020003" pitchFamily="2" charset="0"/>
-              <a:ea typeface="Bodoni Ornaments" pitchFamily="2" charset="0"/>
-            </a:endParaRPr>
-          </a:p>
-          <a:p>
-            <a:endParaRPr lang="en-US" sz="4400" dirty="0">
+            <a:endParaRPr lang="en-US" sz="5400" dirty="0">
+              <a:solidFill>
+                <a:schemeClr val="bg1"/>
+              </a:solidFill>
+              <a:latin typeface="Avenir Medium" panose="02000503020000020003" pitchFamily="2" charset="0"/>
+              <a:ea typeface="Bodoni Ornaments" pitchFamily="2" charset="0"/>
+            </a:endParaRPr>
+          </a:p>
+          <a:p>
+            <a:endParaRPr lang="en-US" sz="5400" dirty="0">
+              <a:solidFill>
+                <a:schemeClr val="bg1"/>
+              </a:solidFill>
+              <a:latin typeface="Avenir Medium" panose="02000503020000020003" pitchFamily="2" charset="0"/>
+              <a:ea typeface="Bodoni Ornaments" pitchFamily="2" charset="0"/>
+            </a:endParaRPr>
+          </a:p>
+          <a:p>
+            <a:endParaRPr lang="en-US" sz="5400" dirty="0">
+              <a:solidFill>
+                <a:schemeClr val="bg1"/>
+              </a:solidFill>
+              <a:latin typeface="Avenir Medium" panose="02000503020000020003" pitchFamily="2" charset="0"/>
+              <a:ea typeface="Bodoni Ornaments" pitchFamily="2" charset="0"/>
+            </a:endParaRPr>
+          </a:p>
+          <a:p>
+            <a:endParaRPr lang="en-US" sz="5400" dirty="0">
               <a:solidFill>
                 <a:schemeClr val="bg1"/>
               </a:solidFill>
@@ -4164,7 +4851,161 @@
 </p:sld>
 </file>
 
-<file path=ppt/slides/slide6.xml><?xml version="1.0" encoding="utf-8"?>
+<file path=ppt/slides/slide7.xml><?xml version="1.0" encoding="utf-8"?>
+<p:sld xmlns:a="http://schemas.openxmlformats.org/drawingml/2006/main" xmlns:r="http://schemas.openxmlformats.org/officeDocument/2006/relationships" xmlns:p="http://schemas.openxmlformats.org/presentationml/2006/main">
+  <p:cSld>
+    <p:bg>
+      <p:bgPr>
+        <a:solidFill>
+          <a:schemeClr val="tx1"/>
+        </a:solidFill>
+        <a:effectLst/>
+      </p:bgPr>
+    </p:bg>
+    <p:spTree>
+      <p:nvGrpSpPr>
+        <p:cNvPr id="1" name="">
+          <a:extLst>
+            <a:ext uri="{FF2B5EF4-FFF2-40B4-BE49-F238E27FC236}">
+              <a16:creationId xmlns:a16="http://schemas.microsoft.com/office/drawing/2014/main" id="{D1344B4B-8BF0-09F1-5969-BDC4CA639CBF}"/>
+            </a:ext>
+          </a:extLst>
+        </p:cNvPr>
+        <p:cNvGrpSpPr/>
+        <p:nvPr/>
+      </p:nvGrpSpPr>
+      <p:grpSpPr>
+        <a:xfrm>
+          <a:off x="0" y="0"/>
+          <a:ext cx="0" cy="0"/>
+          <a:chOff x="0" y="0"/>
+          <a:chExt cx="0" cy="0"/>
+        </a:xfrm>
+      </p:grpSpPr>
+      <p:sp>
+        <p:nvSpPr>
+          <p:cNvPr id="3" name="Subtitle 2">
+            <a:extLst>
+              <a:ext uri="{FF2B5EF4-FFF2-40B4-BE49-F238E27FC236}">
+                <a16:creationId xmlns:a16="http://schemas.microsoft.com/office/drawing/2014/main" id="{CFB49DEE-8B61-A563-8E26-5C8D9B0FF7E7}"/>
+              </a:ext>
+            </a:extLst>
+          </p:cNvPr>
+          <p:cNvSpPr>
+            <a:spLocks noGrp="1"/>
+          </p:cNvSpPr>
+          <p:nvPr>
+            <p:ph type="subTitle" idx="1"/>
+          </p:nvPr>
+        </p:nvSpPr>
+        <p:spPr>
+          <a:xfrm>
+            <a:off x="84221" y="213360"/>
+            <a:ext cx="8891337" cy="6416040"/>
+          </a:xfrm>
+        </p:spPr>
+        <p:txBody>
+          <a:bodyPr>
+            <a:noAutofit/>
+          </a:bodyPr>
+          <a:lstStyle/>
+          <a:p>
+            <a:endParaRPr lang="en-US" sz="5400" dirty="0">
+              <a:solidFill>
+                <a:schemeClr val="bg1"/>
+              </a:solidFill>
+              <a:latin typeface="Avenir Medium" panose="02000503020000020003" pitchFamily="2" charset="0"/>
+              <a:ea typeface="Bodoni Ornaments" pitchFamily="2" charset="0"/>
+            </a:endParaRPr>
+          </a:p>
+          <a:p>
+            <a:r>
+              <a:rPr lang="en-US" sz="5400" dirty="0">
+                <a:solidFill>
+                  <a:schemeClr val="bg1"/>
+                </a:solidFill>
+                <a:latin typeface="Avenir Medium" panose="02000503020000020003" pitchFamily="2" charset="0"/>
+                <a:ea typeface="Bodoni Ornaments" pitchFamily="2" charset="0"/>
+              </a:rPr>
+              <a:t> </a:t>
+            </a:r>
+          </a:p>
+          <a:p>
+            <a:endParaRPr lang="en-US" sz="5400" dirty="0">
+              <a:solidFill>
+                <a:schemeClr val="bg1"/>
+              </a:solidFill>
+              <a:latin typeface="Avenir Medium" panose="02000503020000020003" pitchFamily="2" charset="0"/>
+              <a:ea typeface="Bodoni Ornaments" pitchFamily="2" charset="0"/>
+            </a:endParaRPr>
+          </a:p>
+          <a:p>
+            <a:r>
+              <a:rPr lang="en-US" sz="5400" dirty="0">
+                <a:solidFill>
+                  <a:schemeClr val="bg1"/>
+                </a:solidFill>
+                <a:latin typeface="Avenir Medium" panose="02000503020000020003" pitchFamily="2" charset="0"/>
+                <a:ea typeface="Bodoni Ornaments" pitchFamily="2" charset="0"/>
+              </a:rPr>
+              <a:t>Our sins they are many, </a:t>
+            </a:r>
+          </a:p>
+          <a:p>
+            <a:r>
+              <a:rPr lang="en-US" sz="5400" dirty="0">
+                <a:solidFill>
+                  <a:schemeClr val="bg1"/>
+                </a:solidFill>
+                <a:latin typeface="Avenir Medium" panose="02000503020000020003" pitchFamily="2" charset="0"/>
+                <a:ea typeface="Bodoni Ornaments" pitchFamily="2" charset="0"/>
+              </a:rPr>
+              <a:t>His mercy is more</a:t>
+            </a:r>
+          </a:p>
+          <a:p>
+            <a:endParaRPr lang="en-US" sz="5400" dirty="0">
+              <a:solidFill>
+                <a:schemeClr val="bg1"/>
+              </a:solidFill>
+              <a:latin typeface="Avenir Medium" panose="02000503020000020003" pitchFamily="2" charset="0"/>
+              <a:ea typeface="Bodoni Ornaments" pitchFamily="2" charset="0"/>
+            </a:endParaRPr>
+          </a:p>
+          <a:p>
+            <a:endParaRPr lang="en-US" sz="5400" dirty="0">
+              <a:solidFill>
+                <a:schemeClr val="bg1"/>
+              </a:solidFill>
+              <a:latin typeface="Avenir Medium" panose="02000503020000020003" pitchFamily="2" charset="0"/>
+              <a:ea typeface="Bodoni Ornaments" pitchFamily="2" charset="0"/>
+            </a:endParaRPr>
+          </a:p>
+          <a:p>
+            <a:endParaRPr lang="en-US" sz="5400" dirty="0">
+              <a:solidFill>
+                <a:schemeClr val="bg1"/>
+              </a:solidFill>
+              <a:latin typeface="Avenir Medium" panose="02000503020000020003" pitchFamily="2" charset="0"/>
+              <a:ea typeface="Bodoni Ornaments" pitchFamily="2" charset="0"/>
+            </a:endParaRPr>
+          </a:p>
+        </p:txBody>
+      </p:sp>
+    </p:spTree>
+    <p:extLst>
+      <p:ext uri="{BB962C8B-B14F-4D97-AF65-F5344CB8AC3E}">
+        <p14:creationId xmlns:p14="http://schemas.microsoft.com/office/powerpoint/2010/main" val="454054515"/>
+      </p:ext>
+    </p:extLst>
+  </p:cSld>
+  <p:clrMapOvr>
+    <a:masterClrMapping/>
+  </p:clrMapOvr>
+</p:sld>
+</file>
+
+<file path=ppt/slides/slide8.xml><?xml version="1.0" encoding="utf-8"?>
 <p:sld xmlns:a="http://schemas.openxmlformats.org/drawingml/2006/main" xmlns:r="http://schemas.openxmlformats.org/officeDocument/2006/relationships" xmlns:p="http://schemas.openxmlformats.org/presentationml/2006/main">
   <p:cSld>
     <p:bg>
@@ -4223,17 +5064,17 @@
           </a:bodyPr>
           <a:lstStyle/>
           <a:p>
-            <a:endParaRPr lang="en-US" sz="4400" dirty="0">
-              <a:solidFill>
-                <a:schemeClr val="bg1"/>
-              </a:solidFill>
-              <a:latin typeface="Avenir Medium" panose="02000503020000020003" pitchFamily="2" charset="0"/>
-              <a:ea typeface="Bodoni Ornaments" pitchFamily="2" charset="0"/>
-            </a:endParaRPr>
-          </a:p>
-          <a:p>
-            <a:r>
-              <a:rPr lang="en-US" sz="4400" dirty="0">
+            <a:endParaRPr lang="en-US" sz="5400" dirty="0">
+              <a:solidFill>
+                <a:schemeClr val="bg1"/>
+              </a:solidFill>
+              <a:latin typeface="Avenir Medium" panose="02000503020000020003" pitchFamily="2" charset="0"/>
+              <a:ea typeface="Bodoni Ornaments" pitchFamily="2" charset="0"/>
+            </a:endParaRPr>
+          </a:p>
+          <a:p>
+            <a:r>
+              <a:rPr lang="en-US" sz="5400" dirty="0">
                 <a:solidFill>
                   <a:schemeClr val="bg1"/>
                 </a:solidFill>
@@ -4244,17 +5085,17 @@
             </a:r>
           </a:p>
           <a:p>
-            <a:endParaRPr lang="en-US" sz="4400" dirty="0">
-              <a:solidFill>
-                <a:schemeClr val="bg1"/>
-              </a:solidFill>
-              <a:latin typeface="Avenir Medium" panose="02000503020000020003" pitchFamily="2" charset="0"/>
-              <a:ea typeface="Bodoni Ornaments" pitchFamily="2" charset="0"/>
-            </a:endParaRPr>
-          </a:p>
-          <a:p>
-            <a:r>
-              <a:rPr lang="en-US" sz="4400" dirty="0">
+            <a:endParaRPr lang="en-US" sz="5400" dirty="0">
+              <a:solidFill>
+                <a:schemeClr val="bg1"/>
+              </a:solidFill>
+              <a:latin typeface="Avenir Medium" panose="02000503020000020003" pitchFamily="2" charset="0"/>
+              <a:ea typeface="Bodoni Ornaments" pitchFamily="2" charset="0"/>
+            </a:endParaRPr>
+          </a:p>
+          <a:p>
+            <a:r>
+              <a:rPr lang="en-US" sz="5400" dirty="0">
                 <a:solidFill>
                   <a:schemeClr val="bg1"/>
                 </a:solidFill>
@@ -4266,7 +5107,7 @@
           </a:p>
           <a:p>
             <a:r>
-              <a:rPr lang="en-US" sz="4400" dirty="0">
+              <a:rPr lang="en-US" sz="5400" dirty="0">
                 <a:solidFill>
                   <a:schemeClr val="bg1"/>
                 </a:solidFill>
@@ -4277,7 +5118,7 @@
             </a:r>
           </a:p>
           <a:p>
-            <a:endParaRPr lang="en-US" sz="4400" dirty="0">
+            <a:endParaRPr lang="en-US" sz="5400" dirty="0">
               <a:solidFill>
                 <a:schemeClr val="bg1"/>
               </a:solidFill>
@@ -4300,7 +5141,7 @@
 </p:sld>
 </file>
 
-<file path=ppt/slides/slide7.xml><?xml version="1.0" encoding="utf-8"?>
+<file path=ppt/slides/slide9.xml><?xml version="1.0" encoding="utf-8"?>
 <p:sld xmlns:a="http://schemas.openxmlformats.org/drawingml/2006/main" xmlns:r="http://schemas.openxmlformats.org/officeDocument/2006/relationships" xmlns:p="http://schemas.openxmlformats.org/presentationml/2006/main">
   <p:cSld>
     <p:bg>
@@ -4359,17 +5200,17 @@
           </a:bodyPr>
           <a:lstStyle/>
           <a:p>
-            <a:endParaRPr lang="en-US" sz="4400" dirty="0">
-              <a:solidFill>
-                <a:schemeClr val="bg1"/>
-              </a:solidFill>
-              <a:latin typeface="Avenir Medium" panose="02000503020000020003" pitchFamily="2" charset="0"/>
-              <a:ea typeface="Bodoni Ornaments" pitchFamily="2" charset="0"/>
-            </a:endParaRPr>
-          </a:p>
-          <a:p>
-            <a:r>
-              <a:rPr lang="en-US" sz="4400" dirty="0">
+            <a:endParaRPr lang="en-US" sz="5400" dirty="0">
+              <a:solidFill>
+                <a:schemeClr val="bg1"/>
+              </a:solidFill>
+              <a:latin typeface="Avenir Medium" panose="02000503020000020003" pitchFamily="2" charset="0"/>
+              <a:ea typeface="Bodoni Ornaments" pitchFamily="2" charset="0"/>
+            </a:endParaRPr>
+          </a:p>
+          <a:p>
+            <a:r>
+              <a:rPr lang="en-US" sz="5400" dirty="0">
                 <a:solidFill>
                   <a:schemeClr val="bg1"/>
                 </a:solidFill>
@@ -4381,7 +5222,7 @@
           </a:p>
           <a:p>
             <a:r>
-              <a:rPr lang="en-US" sz="4400" dirty="0">
+              <a:rPr lang="en-US" sz="5400" dirty="0">
                 <a:solidFill>
                   <a:schemeClr val="bg1"/>
                 </a:solidFill>
@@ -4392,17 +5233,17 @@
             </a:r>
           </a:p>
           <a:p>
-            <a:endParaRPr lang="en-US" sz="4400" dirty="0">
-              <a:solidFill>
-                <a:schemeClr val="bg1"/>
-              </a:solidFill>
-              <a:latin typeface="Avenir Medium" panose="02000503020000020003" pitchFamily="2" charset="0"/>
-              <a:ea typeface="Bodoni Ornaments" pitchFamily="2" charset="0"/>
-            </a:endParaRPr>
-          </a:p>
-          <a:p>
-            <a:r>
-              <a:rPr lang="en-US" sz="4400" dirty="0">
+            <a:endParaRPr lang="en-US" sz="5400" dirty="0">
+              <a:solidFill>
+                <a:schemeClr val="bg1"/>
+              </a:solidFill>
+              <a:latin typeface="Avenir Medium" panose="02000503020000020003" pitchFamily="2" charset="0"/>
+              <a:ea typeface="Bodoni Ornaments" pitchFamily="2" charset="0"/>
+            </a:endParaRPr>
+          </a:p>
+          <a:p>
+            <a:r>
+              <a:rPr lang="en-US" sz="5400" dirty="0">
                 <a:solidFill>
                   <a:schemeClr val="bg1"/>
                 </a:solidFill>
@@ -4414,7 +5255,7 @@
           </a:p>
           <a:p>
             <a:r>
-              <a:rPr lang="en-US" sz="4400" dirty="0">
+              <a:rPr lang="en-US" sz="5400" dirty="0">
                 <a:solidFill>
                   <a:schemeClr val="bg1"/>
                 </a:solidFill>
@@ -4425,7 +5266,7 @@
             </a:r>
           </a:p>
           <a:p>
-            <a:endParaRPr lang="en-US" sz="4400" dirty="0">
+            <a:endParaRPr lang="en-US" sz="5400" dirty="0">
               <a:solidFill>
                 <a:schemeClr val="bg1"/>
               </a:solidFill>
@@ -4439,353 +5280,6 @@
     <p:extLst>
       <p:ext uri="{BB962C8B-B14F-4D97-AF65-F5344CB8AC3E}">
         <p14:creationId xmlns:p14="http://schemas.microsoft.com/office/powerpoint/2010/main" val="834857670"/>
-      </p:ext>
-    </p:extLst>
-  </p:cSld>
-  <p:clrMapOvr>
-    <a:masterClrMapping/>
-  </p:clrMapOvr>
-</p:sld>
-</file>
-
-<file path=ppt/slides/slide8.xml><?xml version="1.0" encoding="utf-8"?>
-<p:sld xmlns:a="http://schemas.openxmlformats.org/drawingml/2006/main" xmlns:r="http://schemas.openxmlformats.org/officeDocument/2006/relationships" xmlns:p="http://schemas.openxmlformats.org/presentationml/2006/main">
-  <p:cSld>
-    <p:bg>
-      <p:bgPr>
-        <a:solidFill>
-          <a:schemeClr val="tx1"/>
-        </a:solidFill>
-        <a:effectLst/>
-      </p:bgPr>
-    </p:bg>
-    <p:spTree>
-      <p:nvGrpSpPr>
-        <p:cNvPr id="1" name="">
-          <a:extLst>
-            <a:ext uri="{FF2B5EF4-FFF2-40B4-BE49-F238E27FC236}">
-              <a16:creationId xmlns:a16="http://schemas.microsoft.com/office/drawing/2014/main" id="{66E0F6E0-FEFA-9F57-1DF6-F215E44678D8}"/>
-            </a:ext>
-          </a:extLst>
-        </p:cNvPr>
-        <p:cNvGrpSpPr/>
-        <p:nvPr/>
-      </p:nvGrpSpPr>
-      <p:grpSpPr>
-        <a:xfrm>
-          <a:off x="0" y="0"/>
-          <a:ext cx="0" cy="0"/>
-          <a:chOff x="0" y="0"/>
-          <a:chExt cx="0" cy="0"/>
-        </a:xfrm>
-      </p:grpSpPr>
-      <p:sp>
-        <p:nvSpPr>
-          <p:cNvPr id="3" name="Subtitle 2">
-            <a:extLst>
-              <a:ext uri="{FF2B5EF4-FFF2-40B4-BE49-F238E27FC236}">
-                <a16:creationId xmlns:a16="http://schemas.microsoft.com/office/drawing/2014/main" id="{5BD44CC7-EBEF-5573-A5E0-482C171670F6}"/>
-              </a:ext>
-            </a:extLst>
-          </p:cNvPr>
-          <p:cNvSpPr>
-            <a:spLocks noGrp="1"/>
-          </p:cNvSpPr>
-          <p:nvPr>
-            <p:ph type="subTitle" idx="1"/>
-          </p:nvPr>
-        </p:nvSpPr>
-        <p:spPr>
-          <a:xfrm>
-            <a:off x="84221" y="213360"/>
-            <a:ext cx="8891337" cy="6416040"/>
-          </a:xfrm>
-        </p:spPr>
-        <p:txBody>
-          <a:bodyPr>
-            <a:noAutofit/>
-          </a:bodyPr>
-          <a:lstStyle/>
-          <a:p>
-            <a:endParaRPr lang="en-US" sz="4400" dirty="0">
-              <a:solidFill>
-                <a:schemeClr val="bg1"/>
-              </a:solidFill>
-              <a:latin typeface="Avenir Medium" panose="02000503020000020003" pitchFamily="2" charset="0"/>
-              <a:ea typeface="Bodoni Ornaments" pitchFamily="2" charset="0"/>
-            </a:endParaRPr>
-          </a:p>
-          <a:p>
-            <a:r>
-              <a:rPr lang="en-US" sz="4400" dirty="0">
-                <a:solidFill>
-                  <a:schemeClr val="bg1"/>
-                </a:solidFill>
-                <a:latin typeface="Avenir Medium" panose="02000503020000020003" pitchFamily="2" charset="0"/>
-                <a:ea typeface="Bodoni Ornaments" pitchFamily="2" charset="0"/>
-              </a:rPr>
-              <a:t>Praise the Lord,</a:t>
-            </a:r>
-          </a:p>
-          <a:p>
-            <a:r>
-              <a:rPr lang="en-US" sz="4400" dirty="0">
-                <a:solidFill>
-                  <a:schemeClr val="bg1"/>
-                </a:solidFill>
-                <a:latin typeface="Avenir Medium" panose="02000503020000020003" pitchFamily="2" charset="0"/>
-                <a:ea typeface="Bodoni Ornaments" pitchFamily="2" charset="0"/>
-              </a:rPr>
-              <a:t>His mercy is more</a:t>
-            </a:r>
-          </a:p>
-          <a:p>
-            <a:endParaRPr lang="en-US" sz="4400" dirty="0">
-              <a:solidFill>
-                <a:schemeClr val="bg1"/>
-              </a:solidFill>
-              <a:latin typeface="Avenir Medium" panose="02000503020000020003" pitchFamily="2" charset="0"/>
-              <a:ea typeface="Bodoni Ornaments" pitchFamily="2" charset="0"/>
-            </a:endParaRPr>
-          </a:p>
-          <a:p>
-            <a:r>
-              <a:rPr lang="en-US" sz="4400" dirty="0">
-                <a:solidFill>
-                  <a:schemeClr val="bg1"/>
-                </a:solidFill>
-                <a:latin typeface="Avenir Medium" panose="02000503020000020003" pitchFamily="2" charset="0"/>
-                <a:ea typeface="Bodoni Ornaments" pitchFamily="2" charset="0"/>
-              </a:rPr>
-              <a:t>Stronger than darkness, </a:t>
-            </a:r>
-          </a:p>
-          <a:p>
-            <a:r>
-              <a:rPr lang="en-US" sz="4400" dirty="0">
-                <a:solidFill>
-                  <a:schemeClr val="bg1"/>
-                </a:solidFill>
-                <a:latin typeface="Avenir Medium" panose="02000503020000020003" pitchFamily="2" charset="0"/>
-                <a:ea typeface="Bodoni Ornaments" pitchFamily="2" charset="0"/>
-              </a:rPr>
-              <a:t>new every morn</a:t>
-            </a:r>
-          </a:p>
-          <a:p>
-            <a:endParaRPr lang="en-US" sz="4400" dirty="0">
-              <a:solidFill>
-                <a:schemeClr val="bg1"/>
-              </a:solidFill>
-              <a:latin typeface="Avenir Medium" panose="02000503020000020003" pitchFamily="2" charset="0"/>
-              <a:ea typeface="Bodoni Ornaments" pitchFamily="2" charset="0"/>
-            </a:endParaRPr>
-          </a:p>
-          <a:p>
-            <a:r>
-              <a:rPr lang="en-US" sz="4400" dirty="0">
-                <a:solidFill>
-                  <a:schemeClr val="bg1"/>
-                </a:solidFill>
-                <a:latin typeface="Avenir Medium" panose="02000503020000020003" pitchFamily="2" charset="0"/>
-                <a:ea typeface="Bodoni Ornaments" pitchFamily="2" charset="0"/>
-              </a:rPr>
-              <a:t>Our sins they are many, </a:t>
-            </a:r>
-          </a:p>
-          <a:p>
-            <a:r>
-              <a:rPr lang="en-US" sz="4400" dirty="0">
-                <a:solidFill>
-                  <a:schemeClr val="bg1"/>
-                </a:solidFill>
-                <a:latin typeface="Avenir Medium" panose="02000503020000020003" pitchFamily="2" charset="0"/>
-                <a:ea typeface="Bodoni Ornaments" pitchFamily="2" charset="0"/>
-              </a:rPr>
-              <a:t>His mercy is more</a:t>
-            </a:r>
-          </a:p>
-          <a:p>
-            <a:endParaRPr lang="en-US" sz="4400" dirty="0">
-              <a:solidFill>
-                <a:schemeClr val="bg1"/>
-              </a:solidFill>
-              <a:latin typeface="Avenir Medium" panose="02000503020000020003" pitchFamily="2" charset="0"/>
-              <a:ea typeface="Bodoni Ornaments" pitchFamily="2" charset="0"/>
-            </a:endParaRPr>
-          </a:p>
-          <a:p>
-            <a:endParaRPr lang="en-US" sz="4400" dirty="0">
-              <a:solidFill>
-                <a:schemeClr val="bg1"/>
-              </a:solidFill>
-              <a:latin typeface="Avenir Medium" panose="02000503020000020003" pitchFamily="2" charset="0"/>
-              <a:ea typeface="Bodoni Ornaments" pitchFamily="2" charset="0"/>
-            </a:endParaRPr>
-          </a:p>
-          <a:p>
-            <a:endParaRPr lang="en-US" sz="4400" dirty="0">
-              <a:solidFill>
-                <a:schemeClr val="bg1"/>
-              </a:solidFill>
-              <a:latin typeface="Avenir Medium" panose="02000503020000020003" pitchFamily="2" charset="0"/>
-              <a:ea typeface="Bodoni Ornaments" pitchFamily="2" charset="0"/>
-            </a:endParaRPr>
-          </a:p>
-        </p:txBody>
-      </p:sp>
-    </p:spTree>
-    <p:extLst>
-      <p:ext uri="{BB962C8B-B14F-4D97-AF65-F5344CB8AC3E}">
-        <p14:creationId xmlns:p14="http://schemas.microsoft.com/office/powerpoint/2010/main" val="1612110456"/>
-      </p:ext>
-    </p:extLst>
-  </p:cSld>
-  <p:clrMapOvr>
-    <a:masterClrMapping/>
-  </p:clrMapOvr>
-</p:sld>
-</file>
-
-<file path=ppt/slides/slide9.xml><?xml version="1.0" encoding="utf-8"?>
-<p:sld xmlns:a="http://schemas.openxmlformats.org/drawingml/2006/main" xmlns:r="http://schemas.openxmlformats.org/officeDocument/2006/relationships" xmlns:p="http://schemas.openxmlformats.org/presentationml/2006/main">
-  <p:cSld>
-    <p:bg>
-      <p:bgPr>
-        <a:solidFill>
-          <a:schemeClr val="tx1"/>
-        </a:solidFill>
-        <a:effectLst/>
-      </p:bgPr>
-    </p:bg>
-    <p:spTree>
-      <p:nvGrpSpPr>
-        <p:cNvPr id="1" name="">
-          <a:extLst>
-            <a:ext uri="{FF2B5EF4-FFF2-40B4-BE49-F238E27FC236}">
-              <a16:creationId xmlns:a16="http://schemas.microsoft.com/office/drawing/2014/main" id="{0CD036F9-AB35-4E75-9880-ADCDD5BD4FAA}"/>
-            </a:ext>
-          </a:extLst>
-        </p:cNvPr>
-        <p:cNvGrpSpPr/>
-        <p:nvPr/>
-      </p:nvGrpSpPr>
-      <p:grpSpPr>
-        <a:xfrm>
-          <a:off x="0" y="0"/>
-          <a:ext cx="0" cy="0"/>
-          <a:chOff x="0" y="0"/>
-          <a:chExt cx="0" cy="0"/>
-        </a:xfrm>
-      </p:grpSpPr>
-      <p:sp>
-        <p:nvSpPr>
-          <p:cNvPr id="3" name="Subtitle 2">
-            <a:extLst>
-              <a:ext uri="{FF2B5EF4-FFF2-40B4-BE49-F238E27FC236}">
-                <a16:creationId xmlns:a16="http://schemas.microsoft.com/office/drawing/2014/main" id="{62E7E448-C72E-8A6E-E063-E00AE74682C4}"/>
-              </a:ext>
-            </a:extLst>
-          </p:cNvPr>
-          <p:cNvSpPr>
-            <a:spLocks noGrp="1"/>
-          </p:cNvSpPr>
-          <p:nvPr>
-            <p:ph type="subTitle" idx="1"/>
-          </p:nvPr>
-        </p:nvSpPr>
-        <p:spPr>
-          <a:xfrm>
-            <a:off x="84221" y="213360"/>
-            <a:ext cx="8891337" cy="6416040"/>
-          </a:xfrm>
-        </p:spPr>
-        <p:txBody>
-          <a:bodyPr>
-            <a:noAutofit/>
-          </a:bodyPr>
-          <a:lstStyle/>
-          <a:p>
-            <a:endParaRPr lang="en-US" sz="4400" dirty="0">
-              <a:solidFill>
-                <a:schemeClr val="bg1"/>
-              </a:solidFill>
-              <a:latin typeface="Avenir Medium" panose="02000503020000020003" pitchFamily="2" charset="0"/>
-              <a:ea typeface="Bodoni Ornaments" pitchFamily="2" charset="0"/>
-            </a:endParaRPr>
-          </a:p>
-          <a:p>
-            <a:r>
-              <a:rPr lang="en-US" sz="4400" dirty="0">
-                <a:solidFill>
-                  <a:schemeClr val="bg1"/>
-                </a:solidFill>
-                <a:latin typeface="Avenir Medium" panose="02000503020000020003" pitchFamily="2" charset="0"/>
-                <a:ea typeface="Bodoni Ornaments" pitchFamily="2" charset="0"/>
-              </a:rPr>
-              <a:t>What riches of kindness </a:t>
-            </a:r>
-          </a:p>
-          <a:p>
-            <a:r>
-              <a:rPr lang="en-US" sz="4400" dirty="0">
-                <a:solidFill>
-                  <a:schemeClr val="bg1"/>
-                </a:solidFill>
-                <a:latin typeface="Avenir Medium" panose="02000503020000020003" pitchFamily="2" charset="0"/>
-                <a:ea typeface="Bodoni Ornaments" pitchFamily="2" charset="0"/>
-              </a:rPr>
-              <a:t>He lavished on us</a:t>
-            </a:r>
-          </a:p>
-          <a:p>
-            <a:endParaRPr lang="en-US" sz="4400" dirty="0">
-              <a:solidFill>
-                <a:schemeClr val="bg1"/>
-              </a:solidFill>
-              <a:latin typeface="Avenir Medium" panose="02000503020000020003" pitchFamily="2" charset="0"/>
-              <a:ea typeface="Bodoni Ornaments" pitchFamily="2" charset="0"/>
-            </a:endParaRPr>
-          </a:p>
-          <a:p>
-            <a:r>
-              <a:rPr lang="en-US" sz="4400" dirty="0">
-                <a:solidFill>
-                  <a:schemeClr val="bg1"/>
-                </a:solidFill>
-                <a:latin typeface="Avenir Medium" panose="02000503020000020003" pitchFamily="2" charset="0"/>
-                <a:ea typeface="Bodoni Ornaments" pitchFamily="2" charset="0"/>
-              </a:rPr>
-              <a:t>His blood was the payment, </a:t>
-            </a:r>
-          </a:p>
-          <a:p>
-            <a:r>
-              <a:rPr lang="en-US" sz="4400" dirty="0">
-                <a:solidFill>
-                  <a:schemeClr val="bg1"/>
-                </a:solidFill>
-                <a:latin typeface="Avenir Medium" panose="02000503020000020003" pitchFamily="2" charset="0"/>
-                <a:ea typeface="Bodoni Ornaments" pitchFamily="2" charset="0"/>
-              </a:rPr>
-              <a:t>His life was the cost</a:t>
-            </a:r>
-          </a:p>
-          <a:p>
-            <a:endParaRPr lang="en-US" sz="4400" dirty="0">
-              <a:solidFill>
-                <a:schemeClr val="bg1"/>
-              </a:solidFill>
-              <a:latin typeface="Avenir Medium" panose="02000503020000020003" pitchFamily="2" charset="0"/>
-              <a:ea typeface="Bodoni Ornaments" pitchFamily="2" charset="0"/>
-            </a:endParaRPr>
-          </a:p>
-        </p:txBody>
-      </p:sp>
-    </p:spTree>
-    <p:extLst>
-      <p:ext uri="{BB962C8B-B14F-4D97-AF65-F5344CB8AC3E}">
-        <p14:creationId xmlns:p14="http://schemas.microsoft.com/office/powerpoint/2010/main" val="3607307"/>
       </p:ext>
     </p:extLst>
   </p:cSld>
